--- a/awesim-geo-audit.pptx
+++ b/awesim-geo-audit.pptx
@@ -4,6 +4,9 @@
   <p:sldMasterIdLst>
     <p:sldMasterId id="2147483648" r:id="rId1"/>
   </p:sldMasterIdLst>
+  <p:notesMasterIdLst>
+    <p:notesMasterId r:id="rId12"/>
+  </p:notesMasterIdLst>
   <p:sldIdLst>
     <p:sldId id="256" r:id="rId2"/>
     <p:sldId id="257" r:id="rId3"/>
@@ -16,10 +19,7 @@
     <p:sldId id="264" r:id="rId10"/>
     <p:sldId id="265" r:id="rId11"/>
   </p:sldIdLst>
-  <p:notesMasterIdLst>
-    <p:notesMasterId r:id="rId12"/>
-  </p:notesMasterIdLst>
-  <p:sldSz cx="9144000" cy="5143500"/>
+  <p:sldSz cx="9144000" cy="5143500" type="screen16x9"/>
   <p:notesSz cx="5143500" cy="9144000"/>
   <p:defaultTextStyle>
     <a:lvl1pPr marL="0" algn="l" defTabSz="914400" rtl="0" eaLnBrk="1" latinLnBrk="0" hangingPunct="1">
@@ -113,6 +113,11 @@
       </a:defRPr>
     </a:lvl9pPr>
   </p:defaultTextStyle>
+  <p:extLst>
+    <p:ext uri="{EFAFB233-063F-42B5-8137-9DF3F51BA10A}">
+      <p15:sldGuideLst xmlns:p15="http://schemas.microsoft.com/office/powerpoint/2012/main"/>
+    </p:ext>
+  </p:extLst>
 </p:presentation>
 </file>
 
@@ -138,234 +143,10 @@
           <a:chExt cx="0" cy="0"/>
         </a:xfrm>
       </p:grpSpPr>
-      <p:sp>
-        <p:nvSpPr>
-          <p:cNvPr id="2" name="Header Placeholder 1"/>
-          <p:cNvSpPr>
-            <a:spLocks noGrp="1"/>
-          </p:cNvSpPr>
-          <p:nvPr>
-            <p:ph type="hdr" sz="quarter"/>
-          </p:nvPr>
-        </p:nvSpPr>
-        <p:spPr>
-          <a:xfrm>
-            <a:off x="0" y="0"/>
-            <a:ext cx="2971800" cy="458788"/>
-          </a:xfrm>
-          <a:prstGeom prst="rect">
-            <a:avLst/>
-          </a:prstGeom>
-        </p:spPr>
-        <p:txBody>
-          <a:bodyPr vert="horz" lIns="91440" tIns="45720" rIns="91440" bIns="45720" rtlCol="0"/>
-          <a:lstStyle>
-            <a:lvl1pPr algn="l">
-              <a:defRPr sz="1200"/>
-            </a:lvl1pPr>
-          </a:lstStyle>
-          <a:p>
-            <a:endParaRPr lang="en-US"/>
-          </a:p>
-        </p:txBody>
-      </p:sp>
-      <p:sp>
-        <p:nvSpPr>
-          <p:cNvPr id="3" name="Date Placeholder 2"/>
-          <p:cNvSpPr>
-            <a:spLocks noGrp="1"/>
-          </p:cNvSpPr>
-          <p:nvPr>
-            <p:ph type="dt" idx="1"/>
-          </p:nvPr>
-        </p:nvSpPr>
-        <p:spPr>
-          <a:xfrm>
-            <a:off x="3884613" y="0"/>
-            <a:ext cx="2971800" cy="458788"/>
-          </a:xfrm>
-          <a:prstGeom prst="rect">
-            <a:avLst/>
-          </a:prstGeom>
-        </p:spPr>
-        <p:txBody>
-          <a:bodyPr vert="horz" lIns="91440" tIns="45720" rIns="91440" bIns="45720" rtlCol="0"/>
-          <a:lstStyle>
-            <a:lvl1pPr algn="r">
-              <a:defRPr sz="1200"/>
-            </a:lvl1pPr>
-          </a:lstStyle>
-          <a:p>
-            <a:fld id="{5282F153-3F37-0F45-9E97-73ACFA13230C}" type="datetimeFigureOut">
-              <a:rPr lang="en-US"/>
-              <a:t>7/23/19</a:t>
-            </a:fld>
-            <a:endParaRPr lang="en-US"/>
-          </a:p>
-        </p:txBody>
-      </p:sp>
-      <p:sp>
-        <p:nvSpPr>
-          <p:cNvPr id="4" name="Slide Image Placeholder 3"/>
-          <p:cNvSpPr>
-            <a:spLocks noGrp="1" noRot="1" noChangeAspect="1"/>
-          </p:cNvSpPr>
-          <p:nvPr>
-            <p:ph type="sldImg" idx="2"/>
-          </p:nvPr>
-        </p:nvSpPr>
-        <p:spPr>
-          <a:xfrm>
-            <a:off x="685800" y="1143000"/>
-            <a:ext cx="5486400" cy="3086100"/>
-          </a:xfrm>
-          <a:prstGeom prst="rect">
-            <a:avLst/>
-          </a:prstGeom>
-          <a:noFill/>
-          <a:ln w="12700">
-            <a:solidFill>
-              <a:prstClr val="black"/>
-            </a:solidFill>
-          </a:ln>
-        </p:spPr>
-        <p:txBody>
-          <a:bodyPr vert="horz" lIns="91440" tIns="45720" rIns="91440" bIns="45720" rtlCol="0" anchor="ctr"/>
-          <a:lstStyle/>
-          <a:p>
-            <a:endParaRPr lang="en-US"/>
-          </a:p>
-        </p:txBody>
-      </p:sp>
-      <p:sp>
-        <p:nvSpPr>
-          <p:cNvPr id="5" name="Notes Placeholder 4"/>
-          <p:cNvSpPr>
-            <a:spLocks noGrp="1"/>
-          </p:cNvSpPr>
-          <p:nvPr>
-            <p:ph type="body" sz="quarter" idx="3"/>
-          </p:nvPr>
-        </p:nvSpPr>
-        <p:spPr>
-          <a:xfrm>
-            <a:off x="685800" y="4400550"/>
-            <a:ext cx="5486400" cy="3600450"/>
-          </a:xfrm>
-          <a:prstGeom prst="rect">
-            <a:avLst/>
-          </a:prstGeom>
-        </p:spPr>
-        <p:txBody>
-          <a:bodyPr vert="horz" lIns="91440" tIns="45720" rIns="91440" bIns="45720" rtlCol="0"/>
-          <a:lstStyle/>
-          <a:p>
-            <a:pPr lvl="0"/>
-            <a:r>
-              <a:rPr lang="en-US"/>
-              <a:t>Click to edit Master text styles</a:t>
-            </a:r>
-          </a:p>
-          <a:p>
-            <a:pPr lvl="1"/>
-            <a:r>
-              <a:rPr lang="en-US"/>
-              <a:t>Second level</a:t>
-            </a:r>
-          </a:p>
-          <a:p>
-            <a:pPr lvl="2"/>
-            <a:r>
-              <a:rPr lang="en-US"/>
-              <a:t>Third level</a:t>
-            </a:r>
-          </a:p>
-          <a:p>
-            <a:pPr lvl="3"/>
-            <a:r>
-              <a:rPr lang="en-US"/>
-              <a:t>Fourth level</a:t>
-            </a:r>
-          </a:p>
-          <a:p>
-            <a:pPr lvl="4"/>
-            <a:r>
-              <a:rPr lang="en-US"/>
-              <a:t>Fifth level</a:t>
-            </a:r>
-          </a:p>
-        </p:txBody>
-      </p:sp>
-      <p:sp>
-        <p:nvSpPr>
-          <p:cNvPr id="6" name="Footer Placeholder 5"/>
-          <p:cNvSpPr>
-            <a:spLocks noGrp="1"/>
-          </p:cNvSpPr>
-          <p:nvPr>
-            <p:ph type="ftr" sz="quarter" idx="4"/>
-          </p:nvPr>
-        </p:nvSpPr>
-        <p:spPr>
-          <a:xfrm>
-            <a:off x="0" y="8685213"/>
-            <a:ext cx="2971800" cy="458787"/>
-          </a:xfrm>
-          <a:prstGeom prst="rect">
-            <a:avLst/>
-          </a:prstGeom>
-        </p:spPr>
-        <p:txBody>
-          <a:bodyPr vert="horz" lIns="91440" tIns="45720" rIns="91440" bIns="45720" rtlCol="0" anchor="b"/>
-          <a:lstStyle>
-            <a:lvl1pPr algn="l">
-              <a:defRPr sz="1200"/>
-            </a:lvl1pPr>
-          </a:lstStyle>
-          <a:p>
-            <a:endParaRPr lang="en-US"/>
-          </a:p>
-        </p:txBody>
-      </p:sp>
-      <p:sp>
-        <p:nvSpPr>
-          <p:cNvPr id="7" name="Slide Number Placeholder 6"/>
-          <p:cNvSpPr>
-            <a:spLocks noGrp="1"/>
-          </p:cNvSpPr>
-          <p:nvPr>
-            <p:ph type="sldNum" sz="quarter" idx="5"/>
-          </p:nvPr>
-        </p:nvSpPr>
-        <p:spPr>
-          <a:xfrm>
-            <a:off x="3884613" y="8685213"/>
-            <a:ext cx="2971800" cy="458787"/>
-          </a:xfrm>
-          <a:prstGeom prst="rect">
-            <a:avLst/>
-          </a:prstGeom>
-        </p:spPr>
-        <p:txBody>
-          <a:bodyPr vert="horz" lIns="91440" tIns="45720" rIns="91440" bIns="45720" rtlCol="0" anchor="b"/>
-          <a:lstStyle>
-            <a:lvl1pPr algn="r">
-              <a:defRPr sz="1200"/>
-            </a:lvl1pPr>
-          </a:lstStyle>
-          <a:p>
-            <a:fld id="{CE5E9CC1-C706-0F49-92D6-E571CC5EEA8F}" type="slidenum">
-              <a:rPr lang="en-US"/>
-              <a:t>‹#›</a:t>
-            </a:fld>
-            <a:endParaRPr lang="en-US"/>
-          </a:p>
-        </p:txBody>
-      </p:sp>
     </p:spTree>
     <p:extLst>
       <p:ext uri="{BB962C8B-B14F-4D97-AF65-F5344CB8AC3E}">
-        <p14:creationId xmlns:p14="http://schemas.microsoft.com/office/powerpoint/2010/main" val="1024086991"/>
+        <p14:creationId xmlns:p14="http://schemas.microsoft.com/office/powerpoint/2010/main" val="1223688512"/>
       </p:ext>
     </p:extLst>
   </p:cSld>
@@ -509,10 +290,6 @@
           <a:bodyPr/>
           <a:lstStyle/>
           <a:p>
-            <a:r>
-              <a:rPr lang="en-US" dirty="0"/>
-              <a:t/>
-            </a:r>
             <a:endParaRPr lang="en-US" dirty="0"/>
           </a:p>
         </p:txBody>
@@ -597,10 +374,6 @@
           <a:bodyPr/>
           <a:lstStyle/>
           <a:p>
-            <a:r>
-              <a:rPr lang="en-US" dirty="0"/>
-              <a:t/>
-            </a:r>
             <a:endParaRPr lang="en-US" dirty="0"/>
           </a:p>
         </p:txBody>
@@ -685,10 +458,6 @@
           <a:bodyPr/>
           <a:lstStyle/>
           <a:p>
-            <a:r>
-              <a:rPr lang="en-US" dirty="0"/>
-              <a:t/>
-            </a:r>
             <a:endParaRPr lang="en-US" dirty="0"/>
           </a:p>
         </p:txBody>
@@ -773,10 +542,6 @@
           <a:bodyPr/>
           <a:lstStyle/>
           <a:p>
-            <a:r>
-              <a:rPr lang="en-US" dirty="0"/>
-              <a:t/>
-            </a:r>
             <a:endParaRPr lang="en-US" dirty="0"/>
           </a:p>
         </p:txBody>
@@ -861,10 +626,6 @@
           <a:bodyPr/>
           <a:lstStyle/>
           <a:p>
-            <a:r>
-              <a:rPr lang="en-US" dirty="0"/>
-              <a:t/>
-            </a:r>
             <a:endParaRPr lang="en-US" dirty="0"/>
           </a:p>
         </p:txBody>
@@ -949,10 +710,6 @@
           <a:bodyPr/>
           <a:lstStyle/>
           <a:p>
-            <a:r>
-              <a:rPr lang="en-US" dirty="0"/>
-              <a:t/>
-            </a:r>
             <a:endParaRPr lang="en-US" dirty="0"/>
           </a:p>
         </p:txBody>
@@ -1037,10 +794,6 @@
           <a:bodyPr/>
           <a:lstStyle/>
           <a:p>
-            <a:r>
-              <a:rPr lang="en-US" dirty="0"/>
-              <a:t/>
-            </a:r>
             <a:endParaRPr lang="en-US" dirty="0"/>
           </a:p>
         </p:txBody>
@@ -1125,10 +878,6 @@
           <a:bodyPr/>
           <a:lstStyle/>
           <a:p>
-            <a:r>
-              <a:rPr lang="en-US" dirty="0"/>
-              <a:t/>
-            </a:r>
             <a:endParaRPr lang="en-US" dirty="0"/>
           </a:p>
         </p:txBody>
@@ -1213,10 +962,6 @@
           <a:bodyPr/>
           <a:lstStyle/>
           <a:p>
-            <a:r>
-              <a:rPr lang="en-US" dirty="0"/>
-              <a:t/>
-            </a:r>
             <a:endParaRPr lang="en-US" dirty="0"/>
           </a:p>
         </p:txBody>
@@ -1301,10 +1046,6 @@
           <a:bodyPr/>
           <a:lstStyle/>
           <a:p>
-            <a:r>
-              <a:rPr lang="en-US" dirty="0"/>
-              <a:t/>
-            </a:r>
             <a:endParaRPr lang="en-US" dirty="0"/>
           </a:p>
         </p:txBody>
@@ -1378,6 +1119,11 @@
 <file path=ppt/slideMasters/slideMaster1.xml><?xml version="1.0" encoding="utf-8"?>
 <p:sldMaster xmlns:a="http://schemas.openxmlformats.org/drawingml/2006/main" xmlns:r="http://schemas.openxmlformats.org/officeDocument/2006/relationships" xmlns:p="http://schemas.openxmlformats.org/presentationml/2006/main">
   <p:cSld>
+    <p:bg>
+      <p:bgRef idx="1001">
+        <a:schemeClr val="bg1"/>
+      </p:bgRef>
+    </p:bg>
     <p:spTree>
       <p:nvGrpSpPr>
         <p:cNvPr id="1" name=""/>
@@ -1660,6 +1406,7 @@
         <a:solidFill>
           <a:srgbClr val="1B2A4A"/>
         </a:solidFill>
+        <a:effectLst/>
       </p:bgPr>
     </p:bg>
     <p:spTree>
@@ -1700,6 +1447,13 @@
             <a:prstDash val="solid"/>
           </a:ln>
         </p:spPr>
+        <p:txBody>
+          <a:bodyPr/>
+          <a:lstStyle/>
+          <a:p>
+            <a:endParaRPr lang="en-US"/>
+          </a:p>
+        </p:txBody>
       </p:sp>
       <p:sp>
         <p:nvSpPr>
@@ -1722,11 +1476,11 @@
           <a:bodyPr wrap="square" lIns="0" tIns="0" rIns="0" bIns="0" rtlCol="0" anchor="ctr"/>
           <a:lstStyle/>
           <a:p>
-            <a:pPr indent="0" marL="0">
-              <a:buNone/>
-            </a:pPr>
-            <a:r>
-              <a:rPr lang="en-US" sz="1100" b="1" spc="500" kern="0" dirty="0">
+            <a:pPr marL="0" indent="0">
+              <a:buNone/>
+            </a:pPr>
+            <a:r>
+              <a:rPr lang="en-US" sz="1100" b="1" kern="0" spc="500" dirty="0">
                 <a:solidFill>
                   <a:srgbClr val="94A3B8"/>
                 </a:solidFill>
@@ -1758,7 +1512,7 @@
           <a:bodyPr wrap="square" lIns="0" tIns="0" rIns="0" bIns="0" rtlCol="0" anchor="ctr"/>
           <a:lstStyle/>
           <a:p>
-            <a:pPr indent="0" marL="0">
+            <a:pPr marL="0" indent="0">
               <a:buNone/>
             </a:pPr>
             <a:r>
@@ -1772,7 +1526,7 @@
             <a:endParaRPr lang="en-US" sz="4200" dirty="0"/>
           </a:p>
           <a:p>
-            <a:pPr indent="0" marL="0">
+            <a:pPr marL="0" indent="0">
               <a:buNone/>
             </a:pPr>
             <a:r>
@@ -1811,6 +1565,13 @@
             <a:prstDash val="solid"/>
           </a:ln>
         </p:spPr>
+        <p:txBody>
+          <a:bodyPr/>
+          <a:lstStyle/>
+          <a:p>
+            <a:endParaRPr lang="en-US"/>
+          </a:p>
+        </p:txBody>
       </p:sp>
       <p:sp>
         <p:nvSpPr>
@@ -1833,7 +1594,7 @@
           <a:bodyPr wrap="square" lIns="0" tIns="0" rIns="0" bIns="0" rtlCol="0" anchor="ctr"/>
           <a:lstStyle/>
           <a:p>
-            <a:pPr algn="ctr" indent="0" marL="0">
+            <a:pPr marL="0" indent="0" algn="ctr">
               <a:buNone/>
             </a:pPr>
             <a:r>
@@ -1869,7 +1630,7 @@
           <a:bodyPr wrap="square" lIns="0" tIns="0" rIns="0" bIns="0" rtlCol="0" anchor="ctr"/>
           <a:lstStyle/>
           <a:p>
-            <a:pPr indent="0" marL="0">
+            <a:pPr marL="0" indent="0">
               <a:buNone/>
             </a:pPr>
             <a:r>
@@ -1908,6 +1669,13 @@
             <a:prstDash val="solid"/>
           </a:ln>
         </p:spPr>
+        <p:txBody>
+          <a:bodyPr/>
+          <a:lstStyle/>
+          <a:p>
+            <a:endParaRPr lang="en-US"/>
+          </a:p>
+        </p:txBody>
       </p:sp>
       <p:sp>
         <p:nvSpPr>
@@ -1933,6 +1701,13 @@
             <a:prstDash val="solid"/>
           </a:ln>
         </p:spPr>
+        <p:txBody>
+          <a:bodyPr/>
+          <a:lstStyle/>
+          <a:p>
+            <a:endParaRPr lang="en-US"/>
+          </a:p>
+        </p:txBody>
       </p:sp>
       <p:sp>
         <p:nvSpPr>
@@ -1955,7 +1730,7 @@
           <a:bodyPr wrap="square" lIns="0" tIns="0" rIns="0" bIns="0" rtlCol="0" anchor="ctr"/>
           <a:lstStyle/>
           <a:p>
-            <a:pPr algn="ctr" indent="0" marL="0">
+            <a:pPr marL="0" indent="0" algn="ctr">
               <a:buNone/>
             </a:pPr>
             <a:r>
@@ -1991,7 +1766,7 @@
           <a:bodyPr wrap="square" lIns="0" tIns="0" rIns="0" bIns="0" rtlCol="0" anchor="ctr"/>
           <a:lstStyle/>
           <a:p>
-            <a:pPr algn="ctr" indent="0" marL="0">
+            <a:pPr marL="0" indent="0" algn="ctr">
               <a:buNone/>
             </a:pPr>
             <a:r>
@@ -2027,7 +1802,7 @@
           <a:bodyPr wrap="square" lIns="0" tIns="0" rIns="0" bIns="0" rtlCol="0" anchor="ctr"/>
           <a:lstStyle/>
           <a:p>
-            <a:pPr algn="ctr" indent="0" marL="0">
+            <a:pPr marL="0" indent="0" algn="ctr">
               <a:buNone/>
             </a:pPr>
             <a:r>
@@ -2066,6 +1841,13 @@
             <a:prstDash val="solid"/>
           </a:ln>
         </p:spPr>
+        <p:txBody>
+          <a:bodyPr/>
+          <a:lstStyle/>
+          <a:p>
+            <a:endParaRPr lang="en-US"/>
+          </a:p>
+        </p:txBody>
       </p:sp>
       <p:sp>
         <p:nvSpPr>
@@ -2091,6 +1873,13 @@
             <a:prstDash val="solid"/>
           </a:ln>
         </p:spPr>
+        <p:txBody>
+          <a:bodyPr/>
+          <a:lstStyle/>
+          <a:p>
+            <a:endParaRPr lang="en-US"/>
+          </a:p>
+        </p:txBody>
       </p:sp>
       <p:sp>
         <p:nvSpPr>
@@ -2113,7 +1902,7 @@
           <a:bodyPr wrap="square" lIns="0" tIns="0" rIns="0" bIns="0" rtlCol="0" anchor="ctr"/>
           <a:lstStyle/>
           <a:p>
-            <a:pPr algn="ctr" indent="0" marL="0">
+            <a:pPr marL="0" indent="0" algn="ctr">
               <a:buNone/>
             </a:pPr>
             <a:r>
@@ -2149,7 +1938,7 @@
           <a:bodyPr wrap="square" lIns="0" tIns="0" rIns="0" bIns="0" rtlCol="0" anchor="ctr"/>
           <a:lstStyle/>
           <a:p>
-            <a:pPr algn="ctr" indent="0" marL="0">
+            <a:pPr marL="0" indent="0" algn="ctr">
               <a:buNone/>
             </a:pPr>
             <a:r>
@@ -2185,7 +1974,7 @@
           <a:bodyPr wrap="square" lIns="0" tIns="0" rIns="0" bIns="0" rtlCol="0" anchor="ctr"/>
           <a:lstStyle/>
           <a:p>
-            <a:pPr algn="ctr" indent="0" marL="0">
+            <a:pPr marL="0" indent="0" algn="ctr">
               <a:buNone/>
             </a:pPr>
             <a:r>
@@ -2224,6 +2013,13 @@
             <a:prstDash val="solid"/>
           </a:ln>
         </p:spPr>
+        <p:txBody>
+          <a:bodyPr/>
+          <a:lstStyle/>
+          <a:p>
+            <a:endParaRPr lang="en-US"/>
+          </a:p>
+        </p:txBody>
       </p:sp>
       <p:sp>
         <p:nvSpPr>
@@ -2249,6 +2045,13 @@
             <a:prstDash val="solid"/>
           </a:ln>
         </p:spPr>
+        <p:txBody>
+          <a:bodyPr/>
+          <a:lstStyle/>
+          <a:p>
+            <a:endParaRPr lang="en-US"/>
+          </a:p>
+        </p:txBody>
       </p:sp>
       <p:sp>
         <p:nvSpPr>
@@ -2271,7 +2074,7 @@
           <a:bodyPr wrap="square" lIns="0" tIns="0" rIns="0" bIns="0" rtlCol="0" anchor="ctr"/>
           <a:lstStyle/>
           <a:p>
-            <a:pPr algn="ctr" indent="0" marL="0">
+            <a:pPr marL="0" indent="0" algn="ctr">
               <a:buNone/>
             </a:pPr>
             <a:r>
@@ -2307,7 +2110,7 @@
           <a:bodyPr wrap="square" lIns="0" tIns="0" rIns="0" bIns="0" rtlCol="0" anchor="ctr"/>
           <a:lstStyle/>
           <a:p>
-            <a:pPr algn="ctr" indent="0" marL="0">
+            <a:pPr marL="0" indent="0" algn="ctr">
               <a:buNone/>
             </a:pPr>
             <a:r>
@@ -2343,7 +2146,7 @@
           <a:bodyPr wrap="square" lIns="0" tIns="0" rIns="0" bIns="0" rtlCol="0" anchor="ctr"/>
           <a:lstStyle/>
           <a:p>
-            <a:pPr algn="ctr" indent="0" marL="0">
+            <a:pPr marL="0" indent="0" algn="ctr">
               <a:buNone/>
             </a:pPr>
             <a:r>
@@ -2382,6 +2185,13 @@
             <a:prstDash val="solid"/>
           </a:ln>
         </p:spPr>
+        <p:txBody>
+          <a:bodyPr/>
+          <a:lstStyle/>
+          <a:p>
+            <a:endParaRPr lang="en-US"/>
+          </a:p>
+        </p:txBody>
       </p:sp>
       <p:sp>
         <p:nvSpPr>
@@ -2407,6 +2217,13 @@
             <a:prstDash val="solid"/>
           </a:ln>
         </p:spPr>
+        <p:txBody>
+          <a:bodyPr/>
+          <a:lstStyle/>
+          <a:p>
+            <a:endParaRPr lang="en-US"/>
+          </a:p>
+        </p:txBody>
       </p:sp>
       <p:sp>
         <p:nvSpPr>
@@ -2429,7 +2246,7 @@
           <a:bodyPr wrap="square" lIns="0" tIns="0" rIns="0" bIns="0" rtlCol="0" anchor="ctr"/>
           <a:lstStyle/>
           <a:p>
-            <a:pPr algn="ctr" indent="0" marL="0">
+            <a:pPr marL="0" indent="0" algn="ctr">
               <a:buNone/>
             </a:pPr>
             <a:r>
@@ -2465,7 +2282,7 @@
           <a:bodyPr wrap="square" lIns="0" tIns="0" rIns="0" bIns="0" rtlCol="0" anchor="ctr"/>
           <a:lstStyle/>
           <a:p>
-            <a:pPr algn="ctr" indent="0" marL="0">
+            <a:pPr marL="0" indent="0" algn="ctr">
               <a:buNone/>
             </a:pPr>
             <a:r>
@@ -2501,7 +2318,7 @@
           <a:bodyPr wrap="square" lIns="0" tIns="0" rIns="0" bIns="0" rtlCol="0" anchor="ctr"/>
           <a:lstStyle/>
           <a:p>
-            <a:pPr algn="ctr" indent="0" marL="0">
+            <a:pPr marL="0" indent="0" algn="ctr">
               <a:buNone/>
             </a:pPr>
             <a:r>
@@ -2540,6 +2357,13 @@
             <a:prstDash val="solid"/>
           </a:ln>
         </p:spPr>
+        <p:txBody>
+          <a:bodyPr/>
+          <a:lstStyle/>
+          <a:p>
+            <a:endParaRPr lang="en-US"/>
+          </a:p>
+        </p:txBody>
       </p:sp>
       <p:sp>
         <p:nvSpPr>
@@ -2565,6 +2389,13 @@
             <a:prstDash val="solid"/>
           </a:ln>
         </p:spPr>
+        <p:txBody>
+          <a:bodyPr/>
+          <a:lstStyle/>
+          <a:p>
+            <a:endParaRPr lang="en-US"/>
+          </a:p>
+        </p:txBody>
       </p:sp>
       <p:sp>
         <p:nvSpPr>
@@ -2587,7 +2418,7 @@
           <a:bodyPr wrap="square" lIns="0" tIns="0" rIns="0" bIns="0" rtlCol="0" anchor="ctr"/>
           <a:lstStyle/>
           <a:p>
-            <a:pPr algn="ctr" indent="0" marL="0">
+            <a:pPr marL="0" indent="0" algn="ctr">
               <a:buNone/>
             </a:pPr>
             <a:r>
@@ -2623,7 +2454,7 @@
           <a:bodyPr wrap="square" lIns="0" tIns="0" rIns="0" bIns="0" rtlCol="0" anchor="ctr"/>
           <a:lstStyle/>
           <a:p>
-            <a:pPr algn="ctr" indent="0" marL="0">
+            <a:pPr marL="0" indent="0" algn="ctr">
               <a:buNone/>
             </a:pPr>
             <a:r>
@@ -2659,7 +2490,7 @@
           <a:bodyPr wrap="square" lIns="0" tIns="0" rIns="0" bIns="0" rtlCol="0" anchor="ctr"/>
           <a:lstStyle/>
           <a:p>
-            <a:pPr algn="ctr" indent="0" marL="0">
+            <a:pPr marL="0" indent="0" algn="ctr">
               <a:buNone/>
             </a:pPr>
             <a:r>
@@ -2698,6 +2529,13 @@
             <a:prstDash val="solid"/>
           </a:ln>
         </p:spPr>
+        <p:txBody>
+          <a:bodyPr/>
+          <a:lstStyle/>
+          <a:p>
+            <a:endParaRPr lang="en-US"/>
+          </a:p>
+        </p:txBody>
       </p:sp>
       <p:sp>
         <p:nvSpPr>
@@ -2723,6 +2561,13 @@
             <a:prstDash val="solid"/>
           </a:ln>
         </p:spPr>
+        <p:txBody>
+          <a:bodyPr/>
+          <a:lstStyle/>
+          <a:p>
+            <a:endParaRPr lang="en-US"/>
+          </a:p>
+        </p:txBody>
       </p:sp>
       <p:sp>
         <p:nvSpPr>
@@ -2745,7 +2590,7 @@
           <a:bodyPr wrap="square" lIns="0" tIns="0" rIns="0" bIns="0" rtlCol="0" anchor="ctr"/>
           <a:lstStyle/>
           <a:p>
-            <a:pPr algn="ctr" indent="0" marL="0">
+            <a:pPr marL="0" indent="0" algn="ctr">
               <a:buNone/>
             </a:pPr>
             <a:r>
@@ -2781,7 +2626,7 @@
           <a:bodyPr wrap="square" lIns="0" tIns="0" rIns="0" bIns="0" rtlCol="0" anchor="ctr"/>
           <a:lstStyle/>
           <a:p>
-            <a:pPr algn="ctr" indent="0" marL="0">
+            <a:pPr marL="0" indent="0" algn="ctr">
               <a:buNone/>
             </a:pPr>
             <a:r>
@@ -2817,7 +2662,7 @@
           <a:bodyPr wrap="square" lIns="0" tIns="0" rIns="0" bIns="0" rtlCol="0" anchor="ctr"/>
           <a:lstStyle/>
           <a:p>
-            <a:pPr algn="ctr" indent="0" marL="0">
+            <a:pPr marL="0" indent="0" algn="ctr">
               <a:buNone/>
             </a:pPr>
             <a:r>
@@ -2848,6 +2693,7 @@
         <a:solidFill>
           <a:srgbClr val="1B2A4A"/>
         </a:solidFill>
+        <a:effectLst/>
       </p:bgPr>
     </p:bg>
     <p:spTree>
@@ -2888,6 +2734,13 @@
             <a:prstDash val="solid"/>
           </a:ln>
         </p:spPr>
+        <p:txBody>
+          <a:bodyPr/>
+          <a:lstStyle/>
+          <a:p>
+            <a:endParaRPr lang="en-US"/>
+          </a:p>
+        </p:txBody>
       </p:sp>
       <p:sp>
         <p:nvSpPr>
@@ -2910,7 +2763,7 @@
           <a:bodyPr wrap="square" lIns="0" tIns="0" rIns="0" bIns="0" rtlCol="0" anchor="ctr"/>
           <a:lstStyle/>
           <a:p>
-            <a:pPr indent="0" marL="0">
+            <a:pPr marL="0" indent="0">
               <a:buNone/>
             </a:pPr>
             <a:r>
@@ -2946,7 +2799,7 @@
           <a:bodyPr wrap="square" lIns="0" tIns="0" rIns="0" bIns="0" rtlCol="0" anchor="ctr"/>
           <a:lstStyle/>
           <a:p>
-            <a:pPr indent="0" marL="0">
+            <a:pPr marL="0" indent="0">
               <a:buNone/>
             </a:pPr>
             <a:r>
@@ -2960,7 +2813,7 @@
             <a:endParaRPr lang="en-US" sz="1350" dirty="0"/>
           </a:p>
           <a:p>
-            <a:pPr indent="0" marL="0">
+            <a:pPr marL="0" indent="0">
               <a:buNone/>
             </a:pPr>
             <a:r>
@@ -2977,14 +2830,14 @@
       </p:sp>
       <p:sp>
         <p:nvSpPr>
-          <p:cNvPr id="5" name="Shape 3"/>
-          <p:cNvSpPr/>
-          <p:nvPr/>
-        </p:nvSpPr>
-        <p:spPr>
-          <a:xfrm>
-            <a:off x="594360" y="2121408"/>
-            <a:ext cx="2606040" cy="2011680"/>
+          <p:cNvPr id="10" name="Shape 8"/>
+          <p:cNvSpPr/>
+          <p:nvPr/>
+        </p:nvSpPr>
+        <p:spPr>
+          <a:xfrm>
+            <a:off x="653795" y="2075688"/>
+            <a:ext cx="3388815" cy="2011680"/>
           </a:xfrm>
           <a:prstGeom prst="rect">
             <a:avLst/>
@@ -2999,17 +2852,24 @@
             <a:prstDash val="solid"/>
           </a:ln>
         </p:spPr>
-      </p:sp>
-      <p:sp>
-        <p:nvSpPr>
-          <p:cNvPr id="6" name="Shape 4"/>
-          <p:cNvSpPr/>
-          <p:nvPr/>
-        </p:nvSpPr>
-        <p:spPr>
-          <a:xfrm>
-            <a:off x="594360" y="2121408"/>
-            <a:ext cx="2606040" cy="64008"/>
+        <p:txBody>
+          <a:bodyPr/>
+          <a:lstStyle/>
+          <a:p>
+            <a:endParaRPr lang="en-US"/>
+          </a:p>
+        </p:txBody>
+      </p:sp>
+      <p:sp>
+        <p:nvSpPr>
+          <p:cNvPr id="11" name="Shape 9"/>
+          <p:cNvSpPr/>
+          <p:nvPr/>
+        </p:nvSpPr>
+        <p:spPr>
+          <a:xfrm>
+            <a:off x="653796" y="2089404"/>
+            <a:ext cx="3388814" cy="96012"/>
           </a:xfrm>
           <a:prstGeom prst="rect">
             <a:avLst/>
@@ -3024,16 +2884,23 @@
             <a:prstDash val="solid"/>
           </a:ln>
         </p:spPr>
-      </p:sp>
-      <p:sp>
-        <p:nvSpPr>
-          <p:cNvPr id="7" name="Text 5"/>
-          <p:cNvSpPr/>
-          <p:nvPr/>
-        </p:nvSpPr>
-        <p:spPr>
-          <a:xfrm>
-            <a:off x="594360" y="2194560"/>
+        <p:txBody>
+          <a:bodyPr/>
+          <a:lstStyle/>
+          <a:p>
+            <a:endParaRPr lang="en-US"/>
+          </a:p>
+        </p:txBody>
+      </p:sp>
+      <p:sp>
+        <p:nvSpPr>
+          <p:cNvPr id="12" name="Text 10"/>
+          <p:cNvSpPr/>
+          <p:nvPr/>
+        </p:nvSpPr>
+        <p:spPr>
+          <a:xfrm>
+            <a:off x="864108" y="2212848"/>
             <a:ext cx="2606040" cy="914400"/>
           </a:xfrm>
           <a:prstGeom prst="rect">
@@ -3046,7 +2913,7 @@
           <a:bodyPr wrap="square" lIns="0" tIns="0" rIns="0" bIns="0" rtlCol="0" anchor="ctr"/>
           <a:lstStyle/>
           <a:p>
-            <a:pPr algn="ctr" indent="0" marL="0">
+            <a:pPr marL="0" indent="0" algn="ctr">
               <a:buNone/>
             </a:pPr>
             <a:r>
@@ -3055,7 +2922,7 @@
                   <a:srgbClr val="059669"/>
                 </a:solidFill>
               </a:rPr>
-              <a:t>4 fixes</a:t>
+              <a:t>4/100 → 60+</a:t>
             </a:r>
             <a:endParaRPr lang="en-US" sz="2800" dirty="0"/>
           </a:p>
@@ -3063,13 +2930,13 @@
       </p:sp>
       <p:sp>
         <p:nvSpPr>
-          <p:cNvPr id="8" name="Text 6"/>
-          <p:cNvSpPr/>
-          <p:nvPr/>
-        </p:nvSpPr>
-        <p:spPr>
-          <a:xfrm>
-            <a:off x="594360" y="3081528"/>
+          <p:cNvPr id="13" name="Text 11"/>
+          <p:cNvSpPr/>
+          <p:nvPr/>
+        </p:nvSpPr>
+        <p:spPr>
+          <a:xfrm>
+            <a:off x="940027" y="2962656"/>
             <a:ext cx="2606040" cy="347472"/>
           </a:xfrm>
           <a:prstGeom prst="rect">
@@ -3082,7 +2949,7 @@
           <a:bodyPr wrap="square" lIns="0" tIns="0" rIns="0" bIns="0" rtlCol="0" anchor="ctr"/>
           <a:lstStyle/>
           <a:p>
-            <a:pPr algn="ctr" indent="0" marL="0">
+            <a:pPr marL="0" indent="0" algn="ctr">
               <a:buNone/>
             </a:pPr>
             <a:r>
@@ -3091,7 +2958,7 @@
                   <a:srgbClr val="FFFFFF"/>
                 </a:solidFill>
               </a:rPr>
-              <a:t>Under 10 minutes each</a:t>
+              <a:t>Schema alone</a:t>
             </a:r>
             <a:endParaRPr lang="en-US" sz="1100" dirty="0"/>
           </a:p>
@@ -3099,13 +2966,13 @@
       </p:sp>
       <p:sp>
         <p:nvSpPr>
-          <p:cNvPr id="9" name="Text 7"/>
-          <p:cNvSpPr/>
-          <p:nvPr/>
-        </p:nvSpPr>
-        <p:spPr>
-          <a:xfrm>
-            <a:off x="594360" y="3401568"/>
+          <p:cNvPr id="14" name="Text 12"/>
+          <p:cNvSpPr/>
+          <p:nvPr/>
+        </p:nvSpPr>
+        <p:spPr>
+          <a:xfrm>
+            <a:off x="864108" y="3379430"/>
             <a:ext cx="2606040" cy="594360"/>
           </a:xfrm>
           <a:prstGeom prst="rect">
@@ -3118,7 +2985,7 @@
           <a:bodyPr wrap="square" lIns="0" tIns="0" rIns="0" bIns="0" rtlCol="0" anchor="ctr"/>
           <a:lstStyle/>
           <a:p>
-            <a:pPr algn="ctr" indent="0" marL="0">
+            <a:pPr marL="0" indent="0" algn="ctr">
               <a:buNone/>
             </a:pPr>
             <a:r>
@@ -3127,7 +2994,7 @@
                   <a:srgbClr val="94A3B8"/>
                 </a:solidFill>
               </a:rPr>
-              <a:t>Typos · name · locale · schema switch</a:t>
+              <a:t>Biggest single GEO lever on the site</a:t>
             </a:r>
             <a:endParaRPr lang="en-US" sz="950" dirty="0"/>
           </a:p>
@@ -3135,14 +3002,14 @@
       </p:sp>
       <p:sp>
         <p:nvSpPr>
-          <p:cNvPr id="10" name="Shape 8"/>
-          <p:cNvSpPr/>
-          <p:nvPr/>
-        </p:nvSpPr>
-        <p:spPr>
-          <a:xfrm>
-            <a:off x="3410712" y="2121408"/>
-            <a:ext cx="2606040" cy="2011680"/>
+          <p:cNvPr id="15" name="Shape 13"/>
+          <p:cNvSpPr/>
+          <p:nvPr/>
+        </p:nvSpPr>
+        <p:spPr>
+          <a:xfrm>
+            <a:off x="5101392" y="2096783"/>
+            <a:ext cx="3731710" cy="1984248"/>
           </a:xfrm>
           <a:prstGeom prst="rect">
             <a:avLst/>
@@ -3157,17 +3024,24 @@
             <a:prstDash val="solid"/>
           </a:ln>
         </p:spPr>
-      </p:sp>
-      <p:sp>
-        <p:nvSpPr>
-          <p:cNvPr id="11" name="Shape 9"/>
-          <p:cNvSpPr/>
-          <p:nvPr/>
-        </p:nvSpPr>
-        <p:spPr>
-          <a:xfrm>
-            <a:off x="3410712" y="2121408"/>
-            <a:ext cx="2606040" cy="64008"/>
+        <p:txBody>
+          <a:bodyPr/>
+          <a:lstStyle/>
+          <a:p>
+            <a:endParaRPr lang="en-US"/>
+          </a:p>
+        </p:txBody>
+      </p:sp>
+      <p:sp>
+        <p:nvSpPr>
+          <p:cNvPr id="16" name="Shape 14"/>
+          <p:cNvSpPr/>
+          <p:nvPr/>
+        </p:nvSpPr>
+        <p:spPr>
+          <a:xfrm>
+            <a:off x="5101392" y="2075688"/>
+            <a:ext cx="3731711" cy="137160"/>
           </a:xfrm>
           <a:prstGeom prst="rect">
             <a:avLst/>
@@ -3182,16 +3056,23 @@
             <a:prstDash val="solid"/>
           </a:ln>
         </p:spPr>
-      </p:sp>
-      <p:sp>
-        <p:nvSpPr>
-          <p:cNvPr id="12" name="Text 10"/>
-          <p:cNvSpPr/>
-          <p:nvPr/>
-        </p:nvSpPr>
-        <p:spPr>
-          <a:xfrm>
-            <a:off x="3410712" y="2194560"/>
+        <p:txBody>
+          <a:bodyPr/>
+          <a:lstStyle/>
+          <a:p>
+            <a:endParaRPr lang="en-US"/>
+          </a:p>
+        </p:txBody>
+      </p:sp>
+      <p:sp>
+        <p:nvSpPr>
+          <p:cNvPr id="17" name="Text 15"/>
+          <p:cNvSpPr/>
+          <p:nvPr/>
+        </p:nvSpPr>
+        <p:spPr>
+          <a:xfrm>
+            <a:off x="5760720" y="2201619"/>
             <a:ext cx="2606040" cy="914400"/>
           </a:xfrm>
           <a:prstGeom prst="rect">
@@ -3204,7 +3085,7 @@
           <a:bodyPr wrap="square" lIns="0" tIns="0" rIns="0" bIns="0" rtlCol="0" anchor="ctr"/>
           <a:lstStyle/>
           <a:p>
-            <a:pPr algn="ctr" indent="0" marL="0">
+            <a:pPr marL="0" indent="0" algn="ctr">
               <a:buNone/>
             </a:pPr>
             <a:r>
@@ -3213,7 +3094,7 @@
                   <a:srgbClr val="059669"/>
                 </a:solidFill>
               </a:rPr>
-              <a:t>4/100 → 60+</a:t>
+              <a:t>39 → 75+</a:t>
             </a:r>
             <a:endParaRPr lang="en-US" sz="2800" dirty="0"/>
           </a:p>
@@ -3221,13 +3102,13 @@
       </p:sp>
       <p:sp>
         <p:nvSpPr>
-          <p:cNvPr id="13" name="Text 11"/>
-          <p:cNvSpPr/>
-          <p:nvPr/>
-        </p:nvSpPr>
-        <p:spPr>
-          <a:xfrm>
-            <a:off x="3410712" y="3081528"/>
+          <p:cNvPr id="18" name="Text 16"/>
+          <p:cNvSpPr/>
+          <p:nvPr/>
+        </p:nvSpPr>
+        <p:spPr>
+          <a:xfrm>
+            <a:off x="5760720" y="3047358"/>
             <a:ext cx="2606040" cy="347472"/>
           </a:xfrm>
           <a:prstGeom prst="rect">
@@ -3240,7 +3121,7 @@
           <a:bodyPr wrap="square" lIns="0" tIns="0" rIns="0" bIns="0" rtlCol="0" anchor="ctr"/>
           <a:lstStyle/>
           <a:p>
-            <a:pPr algn="ctr" indent="0" marL="0">
+            <a:pPr marL="0" indent="0" algn="ctr">
               <a:buNone/>
             </a:pPr>
             <a:r>
@@ -3249,7 +3130,7 @@
                   <a:srgbClr val="FFFFFF"/>
                 </a:solidFill>
               </a:rPr>
-              <a:t>Schema alone</a:t>
+              <a:t>12-week trajectory</a:t>
             </a:r>
             <a:endParaRPr lang="en-US" sz="1100" dirty="0"/>
           </a:p>
@@ -3257,13 +3138,13 @@
       </p:sp>
       <p:sp>
         <p:nvSpPr>
-          <p:cNvPr id="14" name="Text 12"/>
-          <p:cNvSpPr/>
-          <p:nvPr/>
-        </p:nvSpPr>
-        <p:spPr>
-          <a:xfrm>
-            <a:off x="3410712" y="3401568"/>
+          <p:cNvPr id="19" name="Text 17"/>
+          <p:cNvSpPr/>
+          <p:nvPr/>
+        </p:nvSpPr>
+        <p:spPr>
+          <a:xfrm>
+            <a:off x="5760720" y="3352479"/>
             <a:ext cx="2606040" cy="594360"/>
           </a:xfrm>
           <a:prstGeom prst="rect">
@@ -3276,165 +3157,7 @@
           <a:bodyPr wrap="square" lIns="0" tIns="0" rIns="0" bIns="0" rtlCol="0" anchor="ctr"/>
           <a:lstStyle/>
           <a:p>
-            <a:pPr algn="ctr" indent="0" marL="0">
-              <a:buNone/>
-            </a:pPr>
-            <a:r>
-              <a:rPr lang="en-US" sz="950" dirty="0">
-                <a:solidFill>
-                  <a:srgbClr val="94A3B8"/>
-                </a:solidFill>
-              </a:rPr>
-              <a:t>Biggest single GEO lever on the site</a:t>
-            </a:r>
-            <a:endParaRPr lang="en-US" sz="950" dirty="0"/>
-          </a:p>
-        </p:txBody>
-      </p:sp>
-      <p:sp>
-        <p:nvSpPr>
-          <p:cNvPr id="15" name="Shape 13"/>
-          <p:cNvSpPr/>
-          <p:nvPr/>
-        </p:nvSpPr>
-        <p:spPr>
-          <a:xfrm>
-            <a:off x="6227064" y="2121408"/>
-            <a:ext cx="2606040" cy="2011680"/>
-          </a:xfrm>
-          <a:prstGeom prst="rect">
-            <a:avLst/>
-          </a:prstGeom>
-          <a:solidFill>
-            <a:srgbClr val="2D3F5F"/>
-          </a:solidFill>
-          <a:ln w="12700">
-            <a:solidFill>
-              <a:srgbClr val="2D3F5F"/>
-            </a:solidFill>
-            <a:prstDash val="solid"/>
-          </a:ln>
-        </p:spPr>
-      </p:sp>
-      <p:sp>
-        <p:nvSpPr>
-          <p:cNvPr id="16" name="Shape 14"/>
-          <p:cNvSpPr/>
-          <p:nvPr/>
-        </p:nvSpPr>
-        <p:spPr>
-          <a:xfrm>
-            <a:off x="6227064" y="2121408"/>
-            <a:ext cx="2606040" cy="64008"/>
-          </a:xfrm>
-          <a:prstGeom prst="rect">
-            <a:avLst/>
-          </a:prstGeom>
-          <a:solidFill>
-            <a:srgbClr val="059669"/>
-          </a:solidFill>
-          <a:ln w="12700">
-            <a:solidFill>
-              <a:srgbClr val="059669"/>
-            </a:solidFill>
-            <a:prstDash val="solid"/>
-          </a:ln>
-        </p:spPr>
-      </p:sp>
-      <p:sp>
-        <p:nvSpPr>
-          <p:cNvPr id="17" name="Text 15"/>
-          <p:cNvSpPr/>
-          <p:nvPr/>
-        </p:nvSpPr>
-        <p:spPr>
-          <a:xfrm>
-            <a:off x="6227064" y="2194560"/>
-            <a:ext cx="2606040" cy="914400"/>
-          </a:xfrm>
-          <a:prstGeom prst="rect">
-            <a:avLst/>
-          </a:prstGeom>
-          <a:noFill/>
-          <a:ln/>
-        </p:spPr>
-        <p:txBody>
-          <a:bodyPr wrap="square" lIns="0" tIns="0" rIns="0" bIns="0" rtlCol="0" anchor="ctr"/>
-          <a:lstStyle/>
-          <a:p>
-            <a:pPr algn="ctr" indent="0" marL="0">
-              <a:buNone/>
-            </a:pPr>
-            <a:r>
-              <a:rPr lang="en-US" sz="2800" b="1" dirty="0">
-                <a:solidFill>
-                  <a:srgbClr val="059669"/>
-                </a:solidFill>
-              </a:rPr>
-              <a:t>39 → 75+</a:t>
-            </a:r>
-            <a:endParaRPr lang="en-US" sz="2800" dirty="0"/>
-          </a:p>
-        </p:txBody>
-      </p:sp>
-      <p:sp>
-        <p:nvSpPr>
-          <p:cNvPr id="18" name="Text 16"/>
-          <p:cNvSpPr/>
-          <p:nvPr/>
-        </p:nvSpPr>
-        <p:spPr>
-          <a:xfrm>
-            <a:off x="6227064" y="3081528"/>
-            <a:ext cx="2606040" cy="347472"/>
-          </a:xfrm>
-          <a:prstGeom prst="rect">
-            <a:avLst/>
-          </a:prstGeom>
-          <a:noFill/>
-          <a:ln/>
-        </p:spPr>
-        <p:txBody>
-          <a:bodyPr wrap="square" lIns="0" tIns="0" rIns="0" bIns="0" rtlCol="0" anchor="ctr"/>
-          <a:lstStyle/>
-          <a:p>
-            <a:pPr algn="ctr" indent="0" marL="0">
-              <a:buNone/>
-            </a:pPr>
-            <a:r>
-              <a:rPr lang="en-US" sz="1100" b="1" dirty="0">
-                <a:solidFill>
-                  <a:srgbClr val="FFFFFF"/>
-                </a:solidFill>
-              </a:rPr>
-              <a:t>12-week trajectory</a:t>
-            </a:r>
-            <a:endParaRPr lang="en-US" sz="1100" dirty="0"/>
-          </a:p>
-        </p:txBody>
-      </p:sp>
-      <p:sp>
-        <p:nvSpPr>
-          <p:cNvPr id="19" name="Text 17"/>
-          <p:cNvSpPr/>
-          <p:nvPr/>
-        </p:nvSpPr>
-        <p:spPr>
-          <a:xfrm>
-            <a:off x="6227064" y="3401568"/>
-            <a:ext cx="2606040" cy="594360"/>
-          </a:xfrm>
-          <a:prstGeom prst="rect">
-            <a:avLst/>
-          </a:prstGeom>
-          <a:noFill/>
-          <a:ln/>
-        </p:spPr>
-        <p:txBody>
-          <a:bodyPr wrap="square" lIns="0" tIns="0" rIns="0" bIns="0" rtlCol="0" anchor="ctr"/>
-          <a:lstStyle/>
-          <a:p>
-            <a:pPr algn="ctr" indent="0" marL="0">
+            <a:pPr marL="0" indent="0" algn="ctr">
               <a:buNone/>
             </a:pPr>
             <a:r>
@@ -3470,7 +3193,7 @@
           <a:bodyPr wrap="square" lIns="0" tIns="0" rIns="0" bIns="0" rtlCol="0" anchor="ctr"/>
           <a:lstStyle/>
           <a:p>
-            <a:pPr indent="0" marL="0">
+            <a:pPr marL="0" indent="0">
               <a:buNone/>
             </a:pPr>
             <a:r>
@@ -3482,6 +3205,40 @@
               <a:t>GEO Audit Report  ·  Awesim Building Consultants  ·  May 2026</a:t>
             </a:r>
             <a:endParaRPr lang="en-US" sz="800" dirty="0"/>
+          </a:p>
+        </p:txBody>
+      </p:sp>
+      <p:sp>
+        <p:nvSpPr>
+          <p:cNvPr id="21" name="Text 11">
+            <a:extLst>
+              <a:ext uri="{FF2B5EF4-FFF2-40B4-BE49-F238E27FC236}">
+                <a16:creationId xmlns:a16="http://schemas.microsoft.com/office/drawing/2014/main" id="{C7F80D87-6361-CEF8-6D0A-0ED9265335E3}"/>
+              </a:ext>
+            </a:extLst>
+          </p:cNvPr>
+          <p:cNvSpPr/>
+          <p:nvPr/>
+        </p:nvSpPr>
+        <p:spPr>
+          <a:xfrm>
+            <a:off x="653796" y="3108960"/>
+            <a:ext cx="2606040" cy="347472"/>
+          </a:xfrm>
+          <a:prstGeom prst="rect">
+            <a:avLst/>
+          </a:prstGeom>
+          <a:noFill/>
+          <a:ln/>
+        </p:spPr>
+        <p:txBody>
+          <a:bodyPr wrap="square" lIns="0" tIns="0" rIns="0" bIns="0" rtlCol="0" anchor="ctr"/>
+          <a:lstStyle/>
+          <a:p>
+            <a:pPr marL="0" indent="0" algn="ctr">
+              <a:buNone/>
+            </a:pPr>
+            <a:endParaRPr lang="en-US" sz="1100" dirty="0"/>
           </a:p>
         </p:txBody>
       </p:sp>
@@ -3501,6 +3258,7 @@
         <a:solidFill>
           <a:srgbClr val="F4F6FA"/>
         </a:solidFill>
+        <a:effectLst/>
       </p:bgPr>
     </p:bg>
     <p:spTree>
@@ -3541,6 +3299,13 @@
             <a:prstDash val="solid"/>
           </a:ln>
         </p:spPr>
+        <p:txBody>
+          <a:bodyPr/>
+          <a:lstStyle/>
+          <a:p>
+            <a:endParaRPr lang="en-US"/>
+          </a:p>
+        </p:txBody>
       </p:sp>
       <p:sp>
         <p:nvSpPr>
@@ -3563,7 +3328,7 @@
           <a:bodyPr wrap="square" lIns="0" tIns="0" rIns="0" bIns="0" rtlCol="0" anchor="ctr"/>
           <a:lstStyle/>
           <a:p>
-            <a:pPr indent="0" marL="0">
+            <a:pPr marL="0" indent="0">
               <a:buNone/>
             </a:pPr>
             <a:r>
@@ -3587,7 +3352,7 @@
         <p:spPr>
           <a:xfrm>
             <a:off x="274320" y="896112"/>
-            <a:ext cx="3977640" cy="3840480"/>
+            <a:ext cx="3977640" cy="4018788"/>
           </a:xfrm>
           <a:prstGeom prst="rect">
             <a:avLst/>
@@ -3602,6 +3367,13 @@
             <a:prstDash val="solid"/>
           </a:ln>
         </p:spPr>
+        <p:txBody>
+          <a:bodyPr/>
+          <a:lstStyle/>
+          <a:p>
+            <a:endParaRPr lang="en-US"/>
+          </a:p>
+        </p:txBody>
       </p:sp>
       <p:sp>
         <p:nvSpPr>
@@ -3627,6 +3399,13 @@
             <a:prstDash val="solid"/>
           </a:ln>
         </p:spPr>
+        <p:txBody>
+          <a:bodyPr/>
+          <a:lstStyle/>
+          <a:p>
+            <a:endParaRPr lang="en-US"/>
+          </a:p>
+        </p:txBody>
       </p:sp>
       <p:sp>
         <p:nvSpPr>
@@ -3649,11 +3428,11 @@
           <a:bodyPr wrap="square" lIns="0" tIns="0" rIns="0" bIns="0" rtlCol="0" anchor="ctr"/>
           <a:lstStyle/>
           <a:p>
-            <a:pPr algn="ctr" indent="0" marL="0">
-              <a:buNone/>
-            </a:pPr>
-            <a:r>
-              <a:rPr lang="en-US" sz="1000" b="1" spc="200" kern="0" dirty="0">
+            <a:pPr marL="0" indent="0" algn="ctr">
+              <a:buNone/>
+            </a:pPr>
+            <a:r>
+              <a:rPr lang="en-US" sz="1000" b="1" kern="0" spc="200" dirty="0">
                 <a:solidFill>
                   <a:srgbClr val="FFFFFF"/>
                 </a:solidFill>
@@ -3836,6 +3615,13 @@
             <a:prstDash val="solid"/>
           </a:ln>
         </p:spPr>
+        <p:txBody>
+          <a:bodyPr/>
+          <a:lstStyle/>
+          <a:p>
+            <a:endParaRPr lang="en-US"/>
+          </a:p>
+        </p:txBody>
       </p:sp>
       <p:sp>
         <p:nvSpPr>
@@ -3861,6 +3647,13 @@
             <a:prstDash val="solid"/>
           </a:ln>
         </p:spPr>
+        <p:txBody>
+          <a:bodyPr/>
+          <a:lstStyle/>
+          <a:p>
+            <a:endParaRPr lang="en-US"/>
+          </a:p>
+        </p:txBody>
       </p:sp>
       <p:sp>
         <p:nvSpPr>
@@ -3883,11 +3676,11 @@
           <a:bodyPr wrap="square" lIns="0" tIns="0" rIns="0" bIns="0" rtlCol="0" anchor="ctr"/>
           <a:lstStyle/>
           <a:p>
-            <a:pPr algn="ctr" indent="0" marL="0">
-              <a:buNone/>
-            </a:pPr>
-            <a:r>
-              <a:rPr lang="en-US" sz="1000" b="1" spc="200" kern="0" dirty="0">
+            <a:pPr marL="0" indent="0" algn="ctr">
+              <a:buNone/>
+            </a:pPr>
+            <a:r>
+              <a:rPr lang="en-US" sz="1000" b="1" kern="0" spc="200" dirty="0">
                 <a:solidFill>
                   <a:srgbClr val="FFFFFF"/>
                 </a:solidFill>
@@ -4070,6 +3863,13 @@
             <a:prstDash val="solid"/>
           </a:ln>
         </p:spPr>
+        <p:txBody>
+          <a:bodyPr/>
+          <a:lstStyle/>
+          <a:p>
+            <a:endParaRPr lang="en-US"/>
+          </a:p>
+        </p:txBody>
       </p:sp>
       <p:sp>
         <p:nvSpPr>
@@ -4092,7 +3892,7 @@
           <a:bodyPr wrap="square" lIns="0" tIns="0" rIns="0" bIns="0" rtlCol="0" anchor="ctr"/>
           <a:lstStyle/>
           <a:p>
-            <a:pPr indent="0" marL="0">
+            <a:pPr marL="0" indent="0">
               <a:buNone/>
             </a:pPr>
             <a:r>
@@ -4123,6 +3923,7 @@
         <a:solidFill>
           <a:srgbClr val="F4F6FA"/>
         </a:solidFill>
+        <a:effectLst/>
       </p:bgPr>
     </p:bg>
     <p:spTree>
@@ -4163,6 +3964,13 @@
             <a:prstDash val="solid"/>
           </a:ln>
         </p:spPr>
+        <p:txBody>
+          <a:bodyPr/>
+          <a:lstStyle/>
+          <a:p>
+            <a:endParaRPr lang="en-US"/>
+          </a:p>
+        </p:txBody>
       </p:sp>
       <p:sp>
         <p:nvSpPr>
@@ -4185,7 +3993,7 @@
           <a:bodyPr wrap="square" lIns="0" tIns="0" rIns="0" bIns="0" rtlCol="0" anchor="ctr"/>
           <a:lstStyle/>
           <a:p>
-            <a:pPr indent="0" marL="0">
+            <a:pPr marL="0" indent="0">
               <a:buNone/>
             </a:pPr>
             <a:r>
@@ -4221,7 +4029,7 @@
           <a:bodyPr wrap="square" lIns="0" tIns="0" rIns="0" bIns="0" rtlCol="0" anchor="ctr"/>
           <a:lstStyle/>
           <a:p>
-            <a:pPr indent="0" marL="0">
+            <a:pPr marL="0" indent="0">
               <a:buNone/>
             </a:pPr>
             <a:r>
@@ -4257,7 +4065,7 @@
           <a:bodyPr wrap="square" lIns="0" tIns="0" rIns="0" bIns="0" rtlCol="0" anchor="ctr"/>
           <a:lstStyle/>
           <a:p>
-            <a:pPr indent="0" marL="0">
+            <a:pPr marL="0" indent="0">
               <a:buNone/>
             </a:pPr>
             <a:r>
@@ -4293,7 +4101,7 @@
           <a:bodyPr wrap="square" lIns="0" tIns="0" rIns="0" bIns="0" rtlCol="0" anchor="ctr"/>
           <a:lstStyle/>
           <a:p>
-            <a:pPr indent="0" marL="0">
+            <a:pPr marL="0" indent="0">
               <a:buNone/>
             </a:pPr>
             <a:r>
@@ -4329,7 +4137,7 @@
           <a:bodyPr wrap="square" lIns="0" tIns="0" rIns="0" bIns="0" rtlCol="0" anchor="ctr"/>
           <a:lstStyle/>
           <a:p>
-            <a:pPr indent="0" marL="0">
+            <a:pPr marL="0" indent="0">
               <a:buNone/>
             </a:pPr>
             <a:r>
@@ -4368,6 +4176,13 @@
             <a:prstDash val="solid"/>
           </a:ln>
         </p:spPr>
+        <p:txBody>
+          <a:bodyPr/>
+          <a:lstStyle/>
+          <a:p>
+            <a:endParaRPr lang="en-US"/>
+          </a:p>
+        </p:txBody>
       </p:sp>
       <p:sp>
         <p:nvSpPr>
@@ -4393,6 +4208,13 @@
             <a:prstDash val="solid"/>
           </a:ln>
         </p:spPr>
+        <p:txBody>
+          <a:bodyPr/>
+          <a:lstStyle/>
+          <a:p>
+            <a:endParaRPr lang="en-US"/>
+          </a:p>
+        </p:txBody>
       </p:sp>
       <p:sp>
         <p:nvSpPr>
@@ -4415,7 +4237,7 @@
           <a:bodyPr wrap="square" lIns="50800" tIns="50800" rIns="50800" bIns="50800" rtlCol="0" anchor="ctr"/>
           <a:lstStyle/>
           <a:p>
-            <a:pPr indent="0" marL="0">
+            <a:pPr marL="0" indent="0">
               <a:buNone/>
             </a:pPr>
             <a:r>
@@ -4454,6 +4276,13 @@
             <a:prstDash val="solid"/>
           </a:ln>
         </p:spPr>
+        <p:txBody>
+          <a:bodyPr/>
+          <a:lstStyle/>
+          <a:p>
+            <a:endParaRPr lang="en-US"/>
+          </a:p>
+        </p:txBody>
       </p:sp>
       <p:sp>
         <p:nvSpPr>
@@ -4479,6 +4308,13 @@
             <a:prstDash val="solid"/>
           </a:ln>
         </p:spPr>
+        <p:txBody>
+          <a:bodyPr/>
+          <a:lstStyle/>
+          <a:p>
+            <a:endParaRPr lang="en-US"/>
+          </a:p>
+        </p:txBody>
       </p:sp>
       <p:sp>
         <p:nvSpPr>
@@ -4488,7 +4324,7 @@
         </p:nvSpPr>
         <p:spPr>
           <a:xfrm>
-            <a:off x="3246120" y="1170432"/>
+            <a:off x="3246120" y="1120140"/>
             <a:ext cx="1645920" cy="301752"/>
           </a:xfrm>
           <a:prstGeom prst="rect">
@@ -4501,7 +4337,7 @@
           <a:bodyPr wrap="square" lIns="0" tIns="0" rIns="0" bIns="0" rtlCol="0" anchor="ctr"/>
           <a:lstStyle/>
           <a:p>
-            <a:pPr indent="0" marL="0">
+            <a:pPr marL="0" indent="0">
               <a:buNone/>
             </a:pPr>
             <a:r>
@@ -4537,7 +4373,7 @@
           <a:bodyPr wrap="square" lIns="50800" tIns="50800" rIns="50800" bIns="50800" rtlCol="0" anchor="ctr"/>
           <a:lstStyle/>
           <a:p>
-            <a:pPr indent="0" marL="0">
+            <a:pPr marL="0" indent="0">
               <a:buNone/>
             </a:pPr>
             <a:r>
@@ -4576,6 +4412,13 @@
             <a:prstDash val="solid"/>
           </a:ln>
         </p:spPr>
+        <p:txBody>
+          <a:bodyPr/>
+          <a:lstStyle/>
+          <a:p>
+            <a:endParaRPr lang="en-US"/>
+          </a:p>
+        </p:txBody>
       </p:sp>
       <p:sp>
         <p:nvSpPr>
@@ -4601,6 +4444,13 @@
             <a:prstDash val="solid"/>
           </a:ln>
         </p:spPr>
+        <p:txBody>
+          <a:bodyPr/>
+          <a:lstStyle/>
+          <a:p>
+            <a:endParaRPr lang="en-US"/>
+          </a:p>
+        </p:txBody>
       </p:sp>
       <p:sp>
         <p:nvSpPr>
@@ -4611,7 +4461,7 @@
         <p:spPr>
           <a:xfrm>
             <a:off x="6172200" y="1170432"/>
-            <a:ext cx="2286000" cy="301752"/>
+            <a:ext cx="2286000" cy="200928"/>
           </a:xfrm>
           <a:prstGeom prst="rect">
             <a:avLst/>
@@ -4623,7 +4473,7 @@
           <a:bodyPr wrap="square" lIns="0" tIns="0" rIns="0" bIns="0" rtlCol="0" anchor="ctr"/>
           <a:lstStyle/>
           <a:p>
-            <a:pPr indent="0" marL="0">
+            <a:pPr marL="0" indent="0">
               <a:buNone/>
             </a:pPr>
             <a:r>
@@ -4662,6 +4512,13 @@
             <a:prstDash val="solid"/>
           </a:ln>
         </p:spPr>
+        <p:txBody>
+          <a:bodyPr/>
+          <a:lstStyle/>
+          <a:p>
+            <a:endParaRPr lang="en-US"/>
+          </a:p>
+        </p:txBody>
       </p:sp>
       <p:sp>
         <p:nvSpPr>
@@ -4687,6 +4544,13 @@
             <a:prstDash val="solid"/>
           </a:ln>
         </p:spPr>
+        <p:txBody>
+          <a:bodyPr/>
+          <a:lstStyle/>
+          <a:p>
+            <a:endParaRPr lang="en-US"/>
+          </a:p>
+        </p:txBody>
       </p:sp>
       <p:sp>
         <p:nvSpPr>
@@ -4709,7 +4573,7 @@
           <a:bodyPr wrap="square" lIns="50800" tIns="50800" rIns="50800" bIns="50800" rtlCol="0" anchor="ctr"/>
           <a:lstStyle/>
           <a:p>
-            <a:pPr indent="0" marL="0">
+            <a:pPr marL="0" indent="0">
               <a:buNone/>
             </a:pPr>
             <a:r>
@@ -4748,6 +4612,13 @@
             <a:prstDash val="solid"/>
           </a:ln>
         </p:spPr>
+        <p:txBody>
+          <a:bodyPr/>
+          <a:lstStyle/>
+          <a:p>
+            <a:endParaRPr lang="en-US"/>
+          </a:p>
+        </p:txBody>
       </p:sp>
       <p:sp>
         <p:nvSpPr>
@@ -4773,6 +4644,13 @@
             <a:prstDash val="solid"/>
           </a:ln>
         </p:spPr>
+        <p:txBody>
+          <a:bodyPr/>
+          <a:lstStyle/>
+          <a:p>
+            <a:endParaRPr lang="en-US"/>
+          </a:p>
+        </p:txBody>
       </p:sp>
       <p:sp>
         <p:nvSpPr>
@@ -4782,7 +4660,7 @@
         </p:nvSpPr>
         <p:spPr>
           <a:xfrm>
-            <a:off x="3246120" y="1746504"/>
+            <a:off x="3246120" y="1715864"/>
             <a:ext cx="1645920" cy="301752"/>
           </a:xfrm>
           <a:prstGeom prst="rect">
@@ -4795,7 +4673,7 @@
           <a:bodyPr wrap="square" lIns="0" tIns="0" rIns="0" bIns="0" rtlCol="0" anchor="ctr"/>
           <a:lstStyle/>
           <a:p>
-            <a:pPr indent="0" marL="0">
+            <a:pPr marL="0" indent="0">
               <a:buNone/>
             </a:pPr>
             <a:r>
@@ -4831,7 +4709,7 @@
           <a:bodyPr wrap="square" lIns="50800" tIns="50800" rIns="50800" bIns="50800" rtlCol="0" anchor="ctr"/>
           <a:lstStyle/>
           <a:p>
-            <a:pPr indent="0" marL="0">
+            <a:pPr marL="0" indent="0">
               <a:buNone/>
             </a:pPr>
             <a:r>
@@ -4870,6 +4748,13 @@
             <a:prstDash val="solid"/>
           </a:ln>
         </p:spPr>
+        <p:txBody>
+          <a:bodyPr/>
+          <a:lstStyle/>
+          <a:p>
+            <a:endParaRPr lang="en-US"/>
+          </a:p>
+        </p:txBody>
       </p:sp>
       <p:sp>
         <p:nvSpPr>
@@ -4895,6 +4780,13 @@
             <a:prstDash val="solid"/>
           </a:ln>
         </p:spPr>
+        <p:txBody>
+          <a:bodyPr/>
+          <a:lstStyle/>
+          <a:p>
+            <a:endParaRPr lang="en-US"/>
+          </a:p>
+        </p:txBody>
       </p:sp>
       <p:sp>
         <p:nvSpPr>
@@ -4905,7 +4797,7 @@
         <p:spPr>
           <a:xfrm>
             <a:off x="6172200" y="1746504"/>
-            <a:ext cx="2286000" cy="301752"/>
+            <a:ext cx="2286000" cy="271112"/>
           </a:xfrm>
           <a:prstGeom prst="rect">
             <a:avLst/>
@@ -4917,7 +4809,7 @@
           <a:bodyPr wrap="square" lIns="0" tIns="0" rIns="0" bIns="0" rtlCol="0" anchor="ctr"/>
           <a:lstStyle/>
           <a:p>
-            <a:pPr indent="0" marL="0">
+            <a:pPr marL="0" indent="0">
               <a:buNone/>
             </a:pPr>
             <a:r>
@@ -4956,6 +4848,13 @@
             <a:prstDash val="solid"/>
           </a:ln>
         </p:spPr>
+        <p:txBody>
+          <a:bodyPr/>
+          <a:lstStyle/>
+          <a:p>
+            <a:endParaRPr lang="en-US"/>
+          </a:p>
+        </p:txBody>
       </p:sp>
       <p:sp>
         <p:nvSpPr>
@@ -4981,6 +4880,13 @@
             <a:prstDash val="solid"/>
           </a:ln>
         </p:spPr>
+        <p:txBody>
+          <a:bodyPr/>
+          <a:lstStyle/>
+          <a:p>
+            <a:endParaRPr lang="en-US"/>
+          </a:p>
+        </p:txBody>
       </p:sp>
       <p:sp>
         <p:nvSpPr>
@@ -5003,7 +4909,7 @@
           <a:bodyPr wrap="square" lIns="50800" tIns="50800" rIns="50800" bIns="50800" rtlCol="0" anchor="ctr"/>
           <a:lstStyle/>
           <a:p>
-            <a:pPr indent="0" marL="0">
+            <a:pPr marL="0" indent="0">
               <a:buNone/>
             </a:pPr>
             <a:r>
@@ -5042,6 +4948,13 @@
             <a:prstDash val="solid"/>
           </a:ln>
         </p:spPr>
+        <p:txBody>
+          <a:bodyPr/>
+          <a:lstStyle/>
+          <a:p>
+            <a:endParaRPr lang="en-US"/>
+          </a:p>
+        </p:txBody>
       </p:sp>
       <p:sp>
         <p:nvSpPr>
@@ -5067,6 +4980,13 @@
             <a:prstDash val="solid"/>
           </a:ln>
         </p:spPr>
+        <p:txBody>
+          <a:bodyPr/>
+          <a:lstStyle/>
+          <a:p>
+            <a:endParaRPr lang="en-US"/>
+          </a:p>
+        </p:txBody>
       </p:sp>
       <p:sp>
         <p:nvSpPr>
@@ -5076,7 +4996,7 @@
         </p:nvSpPr>
         <p:spPr>
           <a:xfrm>
-            <a:off x="3246120" y="2322576"/>
+            <a:off x="3246120" y="2275573"/>
             <a:ext cx="1645920" cy="301752"/>
           </a:xfrm>
           <a:prstGeom prst="rect">
@@ -5089,7 +5009,7 @@
           <a:bodyPr wrap="square" lIns="0" tIns="0" rIns="0" bIns="0" rtlCol="0" anchor="ctr"/>
           <a:lstStyle/>
           <a:p>
-            <a:pPr indent="0" marL="0">
+            <a:pPr marL="0" indent="0">
               <a:buNone/>
             </a:pPr>
             <a:r>
@@ -5125,7 +5045,7 @@
           <a:bodyPr wrap="square" lIns="50800" tIns="50800" rIns="50800" bIns="50800" rtlCol="0" anchor="ctr"/>
           <a:lstStyle/>
           <a:p>
-            <a:pPr indent="0" marL="0">
+            <a:pPr marL="0" indent="0">
               <a:buNone/>
             </a:pPr>
             <a:r>
@@ -5164,6 +5084,13 @@
             <a:prstDash val="solid"/>
           </a:ln>
         </p:spPr>
+        <p:txBody>
+          <a:bodyPr/>
+          <a:lstStyle/>
+          <a:p>
+            <a:endParaRPr lang="en-US"/>
+          </a:p>
+        </p:txBody>
       </p:sp>
       <p:sp>
         <p:nvSpPr>
@@ -5189,6 +5116,13 @@
             <a:prstDash val="solid"/>
           </a:ln>
         </p:spPr>
+        <p:txBody>
+          <a:bodyPr/>
+          <a:lstStyle/>
+          <a:p>
+            <a:endParaRPr lang="en-US"/>
+          </a:p>
+        </p:txBody>
       </p:sp>
       <p:sp>
         <p:nvSpPr>
@@ -5199,7 +5133,7 @@
         <p:spPr>
           <a:xfrm>
             <a:off x="6172200" y="2322576"/>
-            <a:ext cx="2286000" cy="301752"/>
+            <a:ext cx="2286000" cy="200928"/>
           </a:xfrm>
           <a:prstGeom prst="rect">
             <a:avLst/>
@@ -5211,7 +5145,7 @@
           <a:bodyPr wrap="square" lIns="0" tIns="0" rIns="0" bIns="0" rtlCol="0" anchor="ctr"/>
           <a:lstStyle/>
           <a:p>
-            <a:pPr indent="0" marL="0">
+            <a:pPr marL="0" indent="0">
               <a:buNone/>
             </a:pPr>
             <a:r>
@@ -5234,7 +5168,7 @@
         </p:nvSpPr>
         <p:spPr>
           <a:xfrm>
-            <a:off x="274320" y="2898648"/>
+            <a:off x="274320" y="2898408"/>
             <a:ext cx="8595360" cy="530352"/>
           </a:xfrm>
           <a:prstGeom prst="rect">
@@ -5250,6 +5184,13 @@
             <a:prstDash val="solid"/>
           </a:ln>
         </p:spPr>
+        <p:txBody>
+          <a:bodyPr/>
+          <a:lstStyle/>
+          <a:p>
+            <a:endParaRPr lang="en-US"/>
+          </a:p>
+        </p:txBody>
       </p:sp>
       <p:sp>
         <p:nvSpPr>
@@ -5275,6 +5216,13 @@
             <a:prstDash val="solid"/>
           </a:ln>
         </p:spPr>
+        <p:txBody>
+          <a:bodyPr/>
+          <a:lstStyle/>
+          <a:p>
+            <a:endParaRPr lang="en-US"/>
+          </a:p>
+        </p:txBody>
       </p:sp>
       <p:sp>
         <p:nvSpPr>
@@ -5297,7 +5245,7 @@
           <a:bodyPr wrap="square" lIns="50800" tIns="50800" rIns="50800" bIns="50800" rtlCol="0" anchor="ctr"/>
           <a:lstStyle/>
           <a:p>
-            <a:pPr indent="0" marL="0">
+            <a:pPr marL="0" indent="0">
               <a:buNone/>
             </a:pPr>
             <a:r>
@@ -5336,6 +5284,13 @@
             <a:prstDash val="solid"/>
           </a:ln>
         </p:spPr>
+        <p:txBody>
+          <a:bodyPr/>
+          <a:lstStyle/>
+          <a:p>
+            <a:endParaRPr lang="en-US"/>
+          </a:p>
+        </p:txBody>
       </p:sp>
       <p:sp>
         <p:nvSpPr>
@@ -5361,6 +5316,13 @@
             <a:prstDash val="solid"/>
           </a:ln>
         </p:spPr>
+        <p:txBody>
+          <a:bodyPr/>
+          <a:lstStyle/>
+          <a:p>
+            <a:endParaRPr lang="en-US"/>
+          </a:p>
+        </p:txBody>
       </p:sp>
       <p:sp>
         <p:nvSpPr>
@@ -5370,8 +5332,8 @@
         </p:nvSpPr>
         <p:spPr>
           <a:xfrm>
-            <a:off x="3246120" y="2898648"/>
-            <a:ext cx="1645920" cy="301752"/>
+            <a:off x="3255264" y="2898648"/>
+            <a:ext cx="1636776" cy="200928"/>
           </a:xfrm>
           <a:prstGeom prst="rect">
             <a:avLst/>
@@ -5383,7 +5345,7 @@
           <a:bodyPr wrap="square" lIns="0" tIns="0" rIns="0" bIns="0" rtlCol="0" anchor="ctr"/>
           <a:lstStyle/>
           <a:p>
-            <a:pPr indent="0" marL="0">
+            <a:pPr marL="0" indent="0">
               <a:buNone/>
             </a:pPr>
             <a:r>
@@ -5419,7 +5381,7 @@
           <a:bodyPr wrap="square" lIns="50800" tIns="50800" rIns="50800" bIns="50800" rtlCol="0" anchor="ctr"/>
           <a:lstStyle/>
           <a:p>
-            <a:pPr indent="0" marL="0">
+            <a:pPr marL="0" indent="0">
               <a:buNone/>
             </a:pPr>
             <a:r>
@@ -5458,6 +5420,13 @@
             <a:prstDash val="solid"/>
           </a:ln>
         </p:spPr>
+        <p:txBody>
+          <a:bodyPr/>
+          <a:lstStyle/>
+          <a:p>
+            <a:endParaRPr lang="en-US"/>
+          </a:p>
+        </p:txBody>
       </p:sp>
       <p:sp>
         <p:nvSpPr>
@@ -5483,6 +5452,13 @@
             <a:prstDash val="solid"/>
           </a:ln>
         </p:spPr>
+        <p:txBody>
+          <a:bodyPr/>
+          <a:lstStyle/>
+          <a:p>
+            <a:endParaRPr lang="en-US"/>
+          </a:p>
+        </p:txBody>
       </p:sp>
       <p:sp>
         <p:nvSpPr>
@@ -5493,7 +5469,7 @@
         <p:spPr>
           <a:xfrm>
             <a:off x="6172200" y="2898648"/>
-            <a:ext cx="2286000" cy="301752"/>
+            <a:ext cx="2286000" cy="182880"/>
           </a:xfrm>
           <a:prstGeom prst="rect">
             <a:avLst/>
@@ -5505,7 +5481,7 @@
           <a:bodyPr wrap="square" lIns="0" tIns="0" rIns="0" bIns="0" rtlCol="0" anchor="ctr"/>
           <a:lstStyle/>
           <a:p>
-            <a:pPr indent="0" marL="0">
+            <a:pPr marL="0" indent="0">
               <a:buNone/>
             </a:pPr>
             <a:r>
@@ -5544,6 +5520,13 @@
             <a:prstDash val="solid"/>
           </a:ln>
         </p:spPr>
+        <p:txBody>
+          <a:bodyPr/>
+          <a:lstStyle/>
+          <a:p>
+            <a:endParaRPr lang="en-US"/>
+          </a:p>
+        </p:txBody>
       </p:sp>
       <p:sp>
         <p:nvSpPr>
@@ -5569,6 +5552,13 @@
             <a:prstDash val="solid"/>
           </a:ln>
         </p:spPr>
+        <p:txBody>
+          <a:bodyPr/>
+          <a:lstStyle/>
+          <a:p>
+            <a:endParaRPr lang="en-US"/>
+          </a:p>
+        </p:txBody>
       </p:sp>
       <p:sp>
         <p:nvSpPr>
@@ -5591,7 +5581,7 @@
           <a:bodyPr wrap="square" lIns="50800" tIns="50800" rIns="50800" bIns="50800" rtlCol="0" anchor="ctr"/>
           <a:lstStyle/>
           <a:p>
-            <a:pPr indent="0" marL="0">
+            <a:pPr marL="0" indent="0">
               <a:buNone/>
             </a:pPr>
             <a:r>
@@ -5630,6 +5620,13 @@
             <a:prstDash val="solid"/>
           </a:ln>
         </p:spPr>
+        <p:txBody>
+          <a:bodyPr/>
+          <a:lstStyle/>
+          <a:p>
+            <a:endParaRPr lang="en-US"/>
+          </a:p>
+        </p:txBody>
       </p:sp>
       <p:sp>
         <p:nvSpPr>
@@ -5655,6 +5652,13 @@
             <a:prstDash val="solid"/>
           </a:ln>
         </p:spPr>
+        <p:txBody>
+          <a:bodyPr/>
+          <a:lstStyle/>
+          <a:p>
+            <a:endParaRPr lang="en-US"/>
+          </a:p>
+        </p:txBody>
       </p:sp>
       <p:sp>
         <p:nvSpPr>
@@ -5665,7 +5669,7 @@
         <p:spPr>
           <a:xfrm>
             <a:off x="3246120" y="3474720"/>
-            <a:ext cx="1645920" cy="301752"/>
+            <a:ext cx="1645920" cy="201168"/>
           </a:xfrm>
           <a:prstGeom prst="rect">
             <a:avLst/>
@@ -5677,7 +5681,7 @@
           <a:bodyPr wrap="square" lIns="0" tIns="0" rIns="0" bIns="0" rtlCol="0" anchor="ctr"/>
           <a:lstStyle/>
           <a:p>
-            <a:pPr indent="0" marL="0">
+            <a:pPr marL="0" indent="0">
               <a:buNone/>
             </a:pPr>
             <a:r>
@@ -5713,7 +5717,7 @@
           <a:bodyPr wrap="square" lIns="50800" tIns="50800" rIns="50800" bIns="50800" rtlCol="0" anchor="ctr"/>
           <a:lstStyle/>
           <a:p>
-            <a:pPr indent="0" marL="0">
+            <a:pPr marL="0" indent="0">
               <a:buNone/>
             </a:pPr>
             <a:r>
@@ -5752,6 +5756,13 @@
             <a:prstDash val="solid"/>
           </a:ln>
         </p:spPr>
+        <p:txBody>
+          <a:bodyPr/>
+          <a:lstStyle/>
+          <a:p>
+            <a:endParaRPr lang="en-US"/>
+          </a:p>
+        </p:txBody>
       </p:sp>
       <p:sp>
         <p:nvSpPr>
@@ -5777,6 +5788,13 @@
             <a:prstDash val="solid"/>
           </a:ln>
         </p:spPr>
+        <p:txBody>
+          <a:bodyPr/>
+          <a:lstStyle/>
+          <a:p>
+            <a:endParaRPr lang="en-US"/>
+          </a:p>
+        </p:txBody>
       </p:sp>
       <p:sp>
         <p:nvSpPr>
@@ -5787,7 +5805,7 @@
         <p:spPr>
           <a:xfrm>
             <a:off x="6172200" y="3474720"/>
-            <a:ext cx="2286000" cy="301752"/>
+            <a:ext cx="2286000" cy="201168"/>
           </a:xfrm>
           <a:prstGeom prst="rect">
             <a:avLst/>
@@ -5799,7 +5817,7 @@
           <a:bodyPr wrap="square" lIns="0" tIns="0" rIns="0" bIns="0" rtlCol="0" anchor="ctr"/>
           <a:lstStyle/>
           <a:p>
-            <a:pPr indent="0" marL="0">
+            <a:pPr marL="0" indent="0">
               <a:buNone/>
             </a:pPr>
             <a:r>
@@ -5838,6 +5856,13 @@
             <a:prstDash val="solid"/>
           </a:ln>
         </p:spPr>
+        <p:txBody>
+          <a:bodyPr/>
+          <a:lstStyle/>
+          <a:p>
+            <a:endParaRPr lang="en-US"/>
+          </a:p>
+        </p:txBody>
       </p:sp>
       <p:sp>
         <p:nvSpPr>
@@ -5863,6 +5888,13 @@
             <a:prstDash val="solid"/>
           </a:ln>
         </p:spPr>
+        <p:txBody>
+          <a:bodyPr/>
+          <a:lstStyle/>
+          <a:p>
+            <a:endParaRPr lang="en-US"/>
+          </a:p>
+        </p:txBody>
       </p:sp>
       <p:sp>
         <p:nvSpPr>
@@ -5885,7 +5917,7 @@
           <a:bodyPr wrap="square" lIns="50800" tIns="50800" rIns="50800" bIns="50800" rtlCol="0" anchor="ctr"/>
           <a:lstStyle/>
           <a:p>
-            <a:pPr indent="0" marL="0">
+            <a:pPr marL="0" indent="0">
               <a:buNone/>
             </a:pPr>
             <a:r>
@@ -5924,6 +5956,13 @@
             <a:prstDash val="solid"/>
           </a:ln>
         </p:spPr>
+        <p:txBody>
+          <a:bodyPr/>
+          <a:lstStyle/>
+          <a:p>
+            <a:endParaRPr lang="en-US"/>
+          </a:p>
+        </p:txBody>
       </p:sp>
       <p:sp>
         <p:nvSpPr>
@@ -5949,6 +5988,13 @@
             <a:prstDash val="solid"/>
           </a:ln>
         </p:spPr>
+        <p:txBody>
+          <a:bodyPr/>
+          <a:lstStyle/>
+          <a:p>
+            <a:endParaRPr lang="en-US"/>
+          </a:p>
+        </p:txBody>
       </p:sp>
       <p:sp>
         <p:nvSpPr>
@@ -5958,8 +6004,8 @@
         </p:nvSpPr>
         <p:spPr>
           <a:xfrm>
-            <a:off x="3246120" y="4050792"/>
-            <a:ext cx="1645920" cy="301752"/>
+            <a:off x="3255264" y="4050792"/>
+            <a:ext cx="1636776" cy="224028"/>
           </a:xfrm>
           <a:prstGeom prst="rect">
             <a:avLst/>
@@ -5971,7 +6017,7 @@
           <a:bodyPr wrap="square" lIns="0" tIns="0" rIns="0" bIns="0" rtlCol="0" anchor="ctr"/>
           <a:lstStyle/>
           <a:p>
-            <a:pPr indent="0" marL="0">
+            <a:pPr marL="0" indent="0">
               <a:buNone/>
             </a:pPr>
             <a:r>
@@ -6007,7 +6053,7 @@
           <a:bodyPr wrap="square" lIns="50800" tIns="50800" rIns="50800" bIns="50800" rtlCol="0" anchor="ctr"/>
           <a:lstStyle/>
           <a:p>
-            <a:pPr indent="0" marL="0">
+            <a:pPr marL="0" indent="0">
               <a:buNone/>
             </a:pPr>
             <a:r>
@@ -6046,6 +6092,13 @@
             <a:prstDash val="solid"/>
           </a:ln>
         </p:spPr>
+        <p:txBody>
+          <a:bodyPr/>
+          <a:lstStyle/>
+          <a:p>
+            <a:endParaRPr lang="en-US"/>
+          </a:p>
+        </p:txBody>
       </p:sp>
       <p:sp>
         <p:nvSpPr>
@@ -6071,6 +6124,13 @@
             <a:prstDash val="solid"/>
           </a:ln>
         </p:spPr>
+        <p:txBody>
+          <a:bodyPr/>
+          <a:lstStyle/>
+          <a:p>
+            <a:endParaRPr lang="en-US"/>
+          </a:p>
+        </p:txBody>
       </p:sp>
       <p:sp>
         <p:nvSpPr>
@@ -6081,7 +6141,7 @@
         <p:spPr>
           <a:xfrm>
             <a:off x="6172200" y="4050792"/>
-            <a:ext cx="2286000" cy="301752"/>
+            <a:ext cx="2286000" cy="224028"/>
           </a:xfrm>
           <a:prstGeom prst="rect">
             <a:avLst/>
@@ -6093,7 +6153,7 @@
           <a:bodyPr wrap="square" lIns="0" tIns="0" rIns="0" bIns="0" rtlCol="0" anchor="ctr"/>
           <a:lstStyle/>
           <a:p>
-            <a:pPr indent="0" marL="0">
+            <a:pPr marL="0" indent="0">
               <a:buNone/>
             </a:pPr>
             <a:r>
@@ -6132,6 +6192,13 @@
             <a:prstDash val="solid"/>
           </a:ln>
         </p:spPr>
+        <p:txBody>
+          <a:bodyPr/>
+          <a:lstStyle/>
+          <a:p>
+            <a:endParaRPr lang="en-US"/>
+          </a:p>
+        </p:txBody>
       </p:sp>
       <p:sp>
         <p:nvSpPr>
@@ -6154,7 +6221,7 @@
           <a:bodyPr wrap="square" lIns="0" tIns="0" rIns="0" bIns="0" rtlCol="0" anchor="ctr"/>
           <a:lstStyle/>
           <a:p>
-            <a:pPr indent="0" marL="0">
+            <a:pPr marL="0" indent="0">
               <a:buNone/>
             </a:pPr>
             <a:r>
@@ -6190,7 +6257,7 @@
           <a:bodyPr wrap="square" lIns="50800" tIns="50800" rIns="50800" bIns="50800" rtlCol="0" anchor="ctr"/>
           <a:lstStyle/>
           <a:p>
-            <a:pPr algn="r" indent="0" marL="0">
+            <a:pPr marL="0" indent="0" algn="r">
               <a:buNone/>
             </a:pPr>
             <a:r>
@@ -6229,6 +6296,13 @@
             <a:prstDash val="solid"/>
           </a:ln>
         </p:spPr>
+        <p:txBody>
+          <a:bodyPr/>
+          <a:lstStyle/>
+          <a:p>
+            <a:endParaRPr lang="en-US"/>
+          </a:p>
+        </p:txBody>
       </p:sp>
       <p:sp>
         <p:nvSpPr>
@@ -6251,7 +6325,7 @@
           <a:bodyPr wrap="square" lIns="0" tIns="0" rIns="0" bIns="0" rtlCol="0" anchor="ctr"/>
           <a:lstStyle/>
           <a:p>
-            <a:pPr indent="0" marL="0">
+            <a:pPr marL="0" indent="0">
               <a:buNone/>
             </a:pPr>
             <a:r>
@@ -6282,6 +6356,7 @@
         <a:solidFill>
           <a:srgbClr val="F4F6FA"/>
         </a:solidFill>
+        <a:effectLst/>
       </p:bgPr>
     </p:bg>
     <p:spTree>
@@ -6322,6 +6397,13 @@
             <a:prstDash val="solid"/>
           </a:ln>
         </p:spPr>
+        <p:txBody>
+          <a:bodyPr/>
+          <a:lstStyle/>
+          <a:p>
+            <a:endParaRPr lang="en-US"/>
+          </a:p>
+        </p:txBody>
       </p:sp>
       <p:sp>
         <p:nvSpPr>
@@ -6344,7 +6426,7 @@
           <a:bodyPr wrap="square" lIns="0" tIns="0" rIns="0" bIns="0" rtlCol="0" anchor="ctr"/>
           <a:lstStyle/>
           <a:p>
-            <a:pPr indent="0" marL="0">
+            <a:pPr marL="0" indent="0">
               <a:buNone/>
             </a:pPr>
             <a:r>
@@ -6383,6 +6465,13 @@
             <a:prstDash val="solid"/>
           </a:ln>
         </p:spPr>
+        <p:txBody>
+          <a:bodyPr/>
+          <a:lstStyle/>
+          <a:p>
+            <a:endParaRPr lang="en-US"/>
+          </a:p>
+        </p:txBody>
       </p:sp>
       <p:sp>
         <p:nvSpPr>
@@ -6408,6 +6497,13 @@
             <a:prstDash val="solid"/>
           </a:ln>
         </p:spPr>
+        <p:txBody>
+          <a:bodyPr/>
+          <a:lstStyle/>
+          <a:p>
+            <a:endParaRPr lang="en-US"/>
+          </a:p>
+        </p:txBody>
       </p:sp>
       <p:sp>
         <p:nvSpPr>
@@ -6430,7 +6526,7 @@
           <a:bodyPr wrap="square" lIns="0" tIns="0" rIns="0" bIns="0" rtlCol="0" anchor="ctr"/>
           <a:lstStyle/>
           <a:p>
-            <a:pPr algn="ctr" indent="0" marL="0">
+            <a:pPr marL="0" indent="0" algn="ctr">
               <a:buNone/>
             </a:pPr>
             <a:r>
@@ -6466,7 +6562,7 @@
           <a:bodyPr wrap="square" lIns="0" tIns="0" rIns="0" bIns="0" rtlCol="0" anchor="ctr"/>
           <a:lstStyle/>
           <a:p>
-            <a:pPr indent="0" marL="0">
+            <a:pPr marL="0" indent="0">
               <a:buNone/>
             </a:pPr>
             <a:r>
@@ -6502,7 +6598,7 @@
           <a:bodyPr wrap="square" lIns="0" tIns="0" rIns="0" bIns="0" rtlCol="0" anchor="ctr"/>
           <a:lstStyle/>
           <a:p>
-            <a:pPr indent="0" marL="0">
+            <a:pPr marL="0" indent="0">
               <a:buNone/>
             </a:pPr>
             <a:r>
@@ -6541,6 +6637,13 @@
             <a:prstDash val="solid"/>
           </a:ln>
         </p:spPr>
+        <p:txBody>
+          <a:bodyPr/>
+          <a:lstStyle/>
+          <a:p>
+            <a:endParaRPr lang="en-US"/>
+          </a:p>
+        </p:txBody>
       </p:sp>
       <p:sp>
         <p:nvSpPr>
@@ -6566,6 +6669,13 @@
             <a:prstDash val="solid"/>
           </a:ln>
         </p:spPr>
+        <p:txBody>
+          <a:bodyPr/>
+          <a:lstStyle/>
+          <a:p>
+            <a:endParaRPr lang="en-US"/>
+          </a:p>
+        </p:txBody>
       </p:sp>
       <p:sp>
         <p:nvSpPr>
@@ -6588,7 +6698,7 @@
           <a:bodyPr wrap="square" lIns="0" tIns="0" rIns="0" bIns="0" rtlCol="0" anchor="ctr"/>
           <a:lstStyle/>
           <a:p>
-            <a:pPr algn="ctr" indent="0" marL="0">
+            <a:pPr marL="0" indent="0" algn="ctr">
               <a:buNone/>
             </a:pPr>
             <a:r>
@@ -6624,7 +6734,7 @@
           <a:bodyPr wrap="square" lIns="0" tIns="0" rIns="0" bIns="0" rtlCol="0" anchor="ctr"/>
           <a:lstStyle/>
           <a:p>
-            <a:pPr indent="0" marL="0">
+            <a:pPr marL="0" indent="0">
               <a:buNone/>
             </a:pPr>
             <a:r>
@@ -6660,7 +6770,7 @@
           <a:bodyPr wrap="square" lIns="0" tIns="0" rIns="0" bIns="0" rtlCol="0" anchor="ctr"/>
           <a:lstStyle/>
           <a:p>
-            <a:pPr indent="0" marL="0">
+            <a:pPr marL="0" indent="0">
               <a:buNone/>
             </a:pPr>
             <a:r>
@@ -6699,6 +6809,13 @@
             <a:prstDash val="solid"/>
           </a:ln>
         </p:spPr>
+        <p:txBody>
+          <a:bodyPr/>
+          <a:lstStyle/>
+          <a:p>
+            <a:endParaRPr lang="en-US"/>
+          </a:p>
+        </p:txBody>
       </p:sp>
       <p:sp>
         <p:nvSpPr>
@@ -6724,6 +6841,13 @@
             <a:prstDash val="solid"/>
           </a:ln>
         </p:spPr>
+        <p:txBody>
+          <a:bodyPr/>
+          <a:lstStyle/>
+          <a:p>
+            <a:endParaRPr lang="en-US"/>
+          </a:p>
+        </p:txBody>
       </p:sp>
       <p:sp>
         <p:nvSpPr>
@@ -6746,7 +6870,7 @@
           <a:bodyPr wrap="square" lIns="0" tIns="0" rIns="0" bIns="0" rtlCol="0" anchor="ctr"/>
           <a:lstStyle/>
           <a:p>
-            <a:pPr algn="ctr" indent="0" marL="0">
+            <a:pPr marL="0" indent="0" algn="ctr">
               <a:buNone/>
             </a:pPr>
             <a:r>
@@ -6782,7 +6906,7 @@
           <a:bodyPr wrap="square" lIns="0" tIns="0" rIns="0" bIns="0" rtlCol="0" anchor="ctr"/>
           <a:lstStyle/>
           <a:p>
-            <a:pPr indent="0" marL="0">
+            <a:pPr marL="0" indent="0">
               <a:buNone/>
             </a:pPr>
             <a:r>
@@ -6818,7 +6942,7 @@
           <a:bodyPr wrap="square" lIns="0" tIns="0" rIns="0" bIns="0" rtlCol="0" anchor="ctr"/>
           <a:lstStyle/>
           <a:p>
-            <a:pPr indent="0" marL="0">
+            <a:pPr marL="0" indent="0">
               <a:buNone/>
             </a:pPr>
             <a:r>
@@ -6857,6 +6981,13 @@
             <a:prstDash val="solid"/>
           </a:ln>
         </p:spPr>
+        <p:txBody>
+          <a:bodyPr/>
+          <a:lstStyle/>
+          <a:p>
+            <a:endParaRPr lang="en-US"/>
+          </a:p>
+        </p:txBody>
       </p:sp>
       <p:sp>
         <p:nvSpPr>
@@ -6882,6 +7013,13 @@
             <a:prstDash val="solid"/>
           </a:ln>
         </p:spPr>
+        <p:txBody>
+          <a:bodyPr/>
+          <a:lstStyle/>
+          <a:p>
+            <a:endParaRPr lang="en-US"/>
+          </a:p>
+        </p:txBody>
       </p:sp>
       <p:sp>
         <p:nvSpPr>
@@ -6904,7 +7042,7 @@
           <a:bodyPr wrap="square" lIns="0" tIns="0" rIns="0" bIns="0" rtlCol="0" anchor="ctr"/>
           <a:lstStyle/>
           <a:p>
-            <a:pPr algn="ctr" indent="0" marL="0">
+            <a:pPr marL="0" indent="0" algn="ctr">
               <a:buNone/>
             </a:pPr>
             <a:r>
@@ -6940,7 +7078,7 @@
           <a:bodyPr wrap="square" lIns="0" tIns="0" rIns="0" bIns="0" rtlCol="0" anchor="ctr"/>
           <a:lstStyle/>
           <a:p>
-            <a:pPr indent="0" marL="0">
+            <a:pPr marL="0" indent="0">
               <a:buNone/>
             </a:pPr>
             <a:r>
@@ -6976,7 +7114,7 @@
           <a:bodyPr wrap="square" lIns="0" tIns="0" rIns="0" bIns="0" rtlCol="0" anchor="ctr"/>
           <a:lstStyle/>
           <a:p>
-            <a:pPr indent="0" marL="0">
+            <a:pPr marL="0" indent="0">
               <a:buNone/>
             </a:pPr>
             <a:r>
@@ -7015,6 +7153,13 @@
             <a:prstDash val="solid"/>
           </a:ln>
         </p:spPr>
+        <p:txBody>
+          <a:bodyPr/>
+          <a:lstStyle/>
+          <a:p>
+            <a:endParaRPr lang="en-US"/>
+          </a:p>
+        </p:txBody>
       </p:sp>
       <p:sp>
         <p:nvSpPr>
@@ -7037,7 +7182,7 @@
           <a:bodyPr wrap="square" lIns="0" tIns="0" rIns="0" bIns="0" rtlCol="0" anchor="ctr"/>
           <a:lstStyle/>
           <a:p>
-            <a:pPr indent="0" marL="0">
+            <a:pPr marL="0" indent="0">
               <a:buNone/>
             </a:pPr>
             <a:r>
@@ -7068,6 +7213,7 @@
         <a:solidFill>
           <a:srgbClr val="F4F6FA"/>
         </a:solidFill>
+        <a:effectLst/>
       </p:bgPr>
     </p:bg>
     <p:spTree>
@@ -7108,6 +7254,13 @@
             <a:prstDash val="solid"/>
           </a:ln>
         </p:spPr>
+        <p:txBody>
+          <a:bodyPr/>
+          <a:lstStyle/>
+          <a:p>
+            <a:endParaRPr lang="en-US"/>
+          </a:p>
+        </p:txBody>
       </p:sp>
       <p:sp>
         <p:nvSpPr>
@@ -7130,7 +7283,7 @@
           <a:bodyPr wrap="square" lIns="0" tIns="0" rIns="0" bIns="0" rtlCol="0" anchor="ctr"/>
           <a:lstStyle/>
           <a:p>
-            <a:pPr indent="0" marL="0">
+            <a:pPr marL="0" indent="0">
               <a:buNone/>
             </a:pPr>
             <a:r>
@@ -7169,6 +7322,13 @@
             <a:prstDash val="solid"/>
           </a:ln>
         </p:spPr>
+        <p:txBody>
+          <a:bodyPr/>
+          <a:lstStyle/>
+          <a:p>
+            <a:endParaRPr lang="en-US"/>
+          </a:p>
+        </p:txBody>
       </p:sp>
       <p:sp>
         <p:nvSpPr>
@@ -7194,6 +7354,13 @@
             <a:prstDash val="solid"/>
           </a:ln>
         </p:spPr>
+        <p:txBody>
+          <a:bodyPr/>
+          <a:lstStyle/>
+          <a:p>
+            <a:endParaRPr lang="en-US"/>
+          </a:p>
+        </p:txBody>
       </p:sp>
       <p:sp>
         <p:nvSpPr>
@@ -7216,7 +7383,7 @@
           <a:bodyPr wrap="square" lIns="0" tIns="0" rIns="0" bIns="0" rtlCol="0" anchor="ctr"/>
           <a:lstStyle/>
           <a:p>
-            <a:pPr algn="ctr" indent="0" marL="0">
+            <a:pPr marL="0" indent="0" algn="ctr">
               <a:buNone/>
             </a:pPr>
             <a:r>
@@ -7252,7 +7419,7 @@
           <a:bodyPr wrap="square" lIns="25400" tIns="25400" rIns="25400" bIns="25400" rtlCol="0" anchor="ctr"/>
           <a:lstStyle/>
           <a:p>
-            <a:pPr indent="0" marL="0">
+            <a:pPr marL="0" indent="0">
               <a:buNone/>
             </a:pPr>
             <a:r>
@@ -7288,7 +7455,7 @@
           <a:bodyPr wrap="square" lIns="25400" tIns="25400" rIns="25400" bIns="25400" rtlCol="0" anchor="ctr"/>
           <a:lstStyle/>
           <a:p>
-            <a:pPr indent="0" marL="0">
+            <a:pPr marL="0" indent="0">
               <a:buNone/>
             </a:pPr>
             <a:r>
@@ -7327,6 +7494,13 @@
             <a:prstDash val="solid"/>
           </a:ln>
         </p:spPr>
+        <p:txBody>
+          <a:bodyPr/>
+          <a:lstStyle/>
+          <a:p>
+            <a:endParaRPr lang="en-US"/>
+          </a:p>
+        </p:txBody>
       </p:sp>
       <p:sp>
         <p:nvSpPr>
@@ -7352,6 +7526,13 @@
             <a:prstDash val="solid"/>
           </a:ln>
         </p:spPr>
+        <p:txBody>
+          <a:bodyPr/>
+          <a:lstStyle/>
+          <a:p>
+            <a:endParaRPr lang="en-US"/>
+          </a:p>
+        </p:txBody>
       </p:sp>
       <p:sp>
         <p:nvSpPr>
@@ -7374,7 +7555,7 @@
           <a:bodyPr wrap="square" lIns="0" tIns="0" rIns="0" bIns="0" rtlCol="0" anchor="ctr"/>
           <a:lstStyle/>
           <a:p>
-            <a:pPr algn="ctr" indent="0" marL="0">
+            <a:pPr marL="0" indent="0" algn="ctr">
               <a:buNone/>
             </a:pPr>
             <a:r>
@@ -7410,7 +7591,7 @@
           <a:bodyPr wrap="square" lIns="25400" tIns="25400" rIns="25400" bIns="25400" rtlCol="0" anchor="ctr"/>
           <a:lstStyle/>
           <a:p>
-            <a:pPr indent="0" marL="0">
+            <a:pPr marL="0" indent="0">
               <a:buNone/>
             </a:pPr>
             <a:r>
@@ -7446,7 +7627,7 @@
           <a:bodyPr wrap="square" lIns="25400" tIns="25400" rIns="25400" bIns="25400" rtlCol="0" anchor="ctr"/>
           <a:lstStyle/>
           <a:p>
-            <a:pPr indent="0" marL="0">
+            <a:pPr marL="0" indent="0">
               <a:buNone/>
             </a:pPr>
             <a:r>
@@ -7485,6 +7666,13 @@
             <a:prstDash val="solid"/>
           </a:ln>
         </p:spPr>
+        <p:txBody>
+          <a:bodyPr/>
+          <a:lstStyle/>
+          <a:p>
+            <a:endParaRPr lang="en-US"/>
+          </a:p>
+        </p:txBody>
       </p:sp>
       <p:sp>
         <p:nvSpPr>
@@ -7510,6 +7698,13 @@
             <a:prstDash val="solid"/>
           </a:ln>
         </p:spPr>
+        <p:txBody>
+          <a:bodyPr/>
+          <a:lstStyle/>
+          <a:p>
+            <a:endParaRPr lang="en-US"/>
+          </a:p>
+        </p:txBody>
       </p:sp>
       <p:sp>
         <p:nvSpPr>
@@ -7532,7 +7727,7 @@
           <a:bodyPr wrap="square" lIns="0" tIns="0" rIns="0" bIns="0" rtlCol="0" anchor="ctr"/>
           <a:lstStyle/>
           <a:p>
-            <a:pPr algn="ctr" indent="0" marL="0">
+            <a:pPr marL="0" indent="0" algn="ctr">
               <a:buNone/>
             </a:pPr>
             <a:r>
@@ -7568,7 +7763,7 @@
           <a:bodyPr wrap="square" lIns="25400" tIns="25400" rIns="25400" bIns="25400" rtlCol="0" anchor="ctr"/>
           <a:lstStyle/>
           <a:p>
-            <a:pPr indent="0" marL="0">
+            <a:pPr marL="0" indent="0">
               <a:buNone/>
             </a:pPr>
             <a:r>
@@ -7604,7 +7799,7 @@
           <a:bodyPr wrap="square" lIns="25400" tIns="25400" rIns="25400" bIns="25400" rtlCol="0" anchor="ctr"/>
           <a:lstStyle/>
           <a:p>
-            <a:pPr indent="0" marL="0">
+            <a:pPr marL="0" indent="0">
               <a:buNone/>
             </a:pPr>
             <a:r>
@@ -7643,6 +7838,13 @@
             <a:prstDash val="solid"/>
           </a:ln>
         </p:spPr>
+        <p:txBody>
+          <a:bodyPr/>
+          <a:lstStyle/>
+          <a:p>
+            <a:endParaRPr lang="en-US"/>
+          </a:p>
+        </p:txBody>
       </p:sp>
       <p:sp>
         <p:nvSpPr>
@@ -7668,6 +7870,13 @@
             <a:prstDash val="solid"/>
           </a:ln>
         </p:spPr>
+        <p:txBody>
+          <a:bodyPr/>
+          <a:lstStyle/>
+          <a:p>
+            <a:endParaRPr lang="en-US"/>
+          </a:p>
+        </p:txBody>
       </p:sp>
       <p:sp>
         <p:nvSpPr>
@@ -7690,7 +7899,7 @@
           <a:bodyPr wrap="square" lIns="0" tIns="0" rIns="0" bIns="0" rtlCol="0" anchor="ctr"/>
           <a:lstStyle/>
           <a:p>
-            <a:pPr algn="ctr" indent="0" marL="0">
+            <a:pPr marL="0" indent="0" algn="ctr">
               <a:buNone/>
             </a:pPr>
             <a:r>
@@ -7726,7 +7935,7 @@
           <a:bodyPr wrap="square" lIns="25400" tIns="25400" rIns="25400" bIns="25400" rtlCol="0" anchor="ctr"/>
           <a:lstStyle/>
           <a:p>
-            <a:pPr indent="0" marL="0">
+            <a:pPr marL="0" indent="0">
               <a:buNone/>
             </a:pPr>
             <a:r>
@@ -7762,7 +7971,7 @@
           <a:bodyPr wrap="square" lIns="25400" tIns="25400" rIns="25400" bIns="25400" rtlCol="0" anchor="ctr"/>
           <a:lstStyle/>
           <a:p>
-            <a:pPr indent="0" marL="0">
+            <a:pPr marL="0" indent="0">
               <a:buNone/>
             </a:pPr>
             <a:r>
@@ -7801,6 +8010,13 @@
             <a:prstDash val="solid"/>
           </a:ln>
         </p:spPr>
+        <p:txBody>
+          <a:bodyPr/>
+          <a:lstStyle/>
+          <a:p>
+            <a:endParaRPr lang="en-US"/>
+          </a:p>
+        </p:txBody>
       </p:sp>
       <p:sp>
         <p:nvSpPr>
@@ -7826,6 +8042,13 @@
             <a:prstDash val="solid"/>
           </a:ln>
         </p:spPr>
+        <p:txBody>
+          <a:bodyPr/>
+          <a:lstStyle/>
+          <a:p>
+            <a:endParaRPr lang="en-US"/>
+          </a:p>
+        </p:txBody>
       </p:sp>
       <p:sp>
         <p:nvSpPr>
@@ -7848,7 +8071,7 @@
           <a:bodyPr wrap="square" lIns="0" tIns="0" rIns="0" bIns="0" rtlCol="0" anchor="ctr"/>
           <a:lstStyle/>
           <a:p>
-            <a:pPr algn="ctr" indent="0" marL="0">
+            <a:pPr marL="0" indent="0" algn="ctr">
               <a:buNone/>
             </a:pPr>
             <a:r>
@@ -7884,7 +8107,7 @@
           <a:bodyPr wrap="square" lIns="25400" tIns="25400" rIns="25400" bIns="25400" rtlCol="0" anchor="ctr"/>
           <a:lstStyle/>
           <a:p>
-            <a:pPr indent="0" marL="0">
+            <a:pPr marL="0" indent="0">
               <a:buNone/>
             </a:pPr>
             <a:r>
@@ -7920,7 +8143,7 @@
           <a:bodyPr wrap="square" lIns="25400" tIns="25400" rIns="25400" bIns="25400" rtlCol="0" anchor="ctr"/>
           <a:lstStyle/>
           <a:p>
-            <a:pPr indent="0" marL="0">
+            <a:pPr marL="0" indent="0">
               <a:buNone/>
             </a:pPr>
             <a:r>
@@ -7959,6 +8182,13 @@
             <a:prstDash val="solid"/>
           </a:ln>
         </p:spPr>
+        <p:txBody>
+          <a:bodyPr/>
+          <a:lstStyle/>
+          <a:p>
+            <a:endParaRPr lang="en-US"/>
+          </a:p>
+        </p:txBody>
       </p:sp>
       <p:sp>
         <p:nvSpPr>
@@ -7984,6 +8214,13 @@
             <a:prstDash val="solid"/>
           </a:ln>
         </p:spPr>
+        <p:txBody>
+          <a:bodyPr/>
+          <a:lstStyle/>
+          <a:p>
+            <a:endParaRPr lang="en-US"/>
+          </a:p>
+        </p:txBody>
       </p:sp>
       <p:sp>
         <p:nvSpPr>
@@ -8006,7 +8243,7 @@
           <a:bodyPr wrap="square" lIns="0" tIns="0" rIns="0" bIns="0" rtlCol="0" anchor="ctr"/>
           <a:lstStyle/>
           <a:p>
-            <a:pPr algn="ctr" indent="0" marL="0">
+            <a:pPr marL="0" indent="0" algn="ctr">
               <a:buNone/>
             </a:pPr>
             <a:r>
@@ -8042,7 +8279,7 @@
           <a:bodyPr wrap="square" lIns="25400" tIns="25400" rIns="25400" bIns="25400" rtlCol="0" anchor="ctr"/>
           <a:lstStyle/>
           <a:p>
-            <a:pPr indent="0" marL="0">
+            <a:pPr marL="0" indent="0">
               <a:buNone/>
             </a:pPr>
             <a:r>
@@ -8078,7 +8315,7 @@
           <a:bodyPr wrap="square" lIns="25400" tIns="25400" rIns="25400" bIns="25400" rtlCol="0" anchor="ctr"/>
           <a:lstStyle/>
           <a:p>
-            <a:pPr indent="0" marL="0">
+            <a:pPr marL="0" indent="0">
               <a:buNone/>
             </a:pPr>
             <a:r>
@@ -8117,6 +8354,13 @@
             <a:prstDash val="solid"/>
           </a:ln>
         </p:spPr>
+        <p:txBody>
+          <a:bodyPr/>
+          <a:lstStyle/>
+          <a:p>
+            <a:endParaRPr lang="en-US"/>
+          </a:p>
+        </p:txBody>
       </p:sp>
       <p:sp>
         <p:nvSpPr>
@@ -8142,6 +8386,13 @@
             <a:prstDash val="solid"/>
           </a:ln>
         </p:spPr>
+        <p:txBody>
+          <a:bodyPr/>
+          <a:lstStyle/>
+          <a:p>
+            <a:endParaRPr lang="en-US"/>
+          </a:p>
+        </p:txBody>
       </p:sp>
       <p:sp>
         <p:nvSpPr>
@@ -8164,7 +8415,7 @@
           <a:bodyPr wrap="square" lIns="0" tIns="0" rIns="0" bIns="0" rtlCol="0" anchor="ctr"/>
           <a:lstStyle/>
           <a:p>
-            <a:pPr algn="ctr" indent="0" marL="0">
+            <a:pPr marL="0" indent="0" algn="ctr">
               <a:buNone/>
             </a:pPr>
             <a:r>
@@ -8200,7 +8451,7 @@
           <a:bodyPr wrap="square" lIns="25400" tIns="25400" rIns="25400" bIns="25400" rtlCol="0" anchor="ctr"/>
           <a:lstStyle/>
           <a:p>
-            <a:pPr indent="0" marL="0">
+            <a:pPr marL="0" indent="0">
               <a:buNone/>
             </a:pPr>
             <a:r>
@@ -8236,7 +8487,7 @@
           <a:bodyPr wrap="square" lIns="25400" tIns="25400" rIns="25400" bIns="25400" rtlCol="0" anchor="ctr"/>
           <a:lstStyle/>
           <a:p>
-            <a:pPr indent="0" marL="0">
+            <a:pPr marL="0" indent="0">
               <a:buNone/>
             </a:pPr>
             <a:r>
@@ -8275,6 +8526,13 @@
             <a:prstDash val="solid"/>
           </a:ln>
         </p:spPr>
+        <p:txBody>
+          <a:bodyPr/>
+          <a:lstStyle/>
+          <a:p>
+            <a:endParaRPr lang="en-US"/>
+          </a:p>
+        </p:txBody>
       </p:sp>
       <p:sp>
         <p:nvSpPr>
@@ -8297,7 +8555,7 @@
           <a:bodyPr wrap="square" lIns="0" tIns="0" rIns="0" bIns="0" rtlCol="0" anchor="ctr"/>
           <a:lstStyle/>
           <a:p>
-            <a:pPr indent="0" marL="0">
+            <a:pPr marL="0" indent="0">
               <a:buNone/>
             </a:pPr>
             <a:r>
@@ -8328,6 +8586,7 @@
         <a:solidFill>
           <a:srgbClr val="F4F6FA"/>
         </a:solidFill>
+        <a:effectLst/>
       </p:bgPr>
     </p:bg>
     <p:spTree>
@@ -8368,6 +8627,13 @@
             <a:prstDash val="solid"/>
           </a:ln>
         </p:spPr>
+        <p:txBody>
+          <a:bodyPr/>
+          <a:lstStyle/>
+          <a:p>
+            <a:endParaRPr lang="en-US"/>
+          </a:p>
+        </p:txBody>
       </p:sp>
       <p:sp>
         <p:nvSpPr>
@@ -8390,7 +8656,7 @@
           <a:bodyPr wrap="square" lIns="0" tIns="0" rIns="0" bIns="0" rtlCol="0" anchor="ctr"/>
           <a:lstStyle/>
           <a:p>
-            <a:pPr indent="0" marL="0">
+            <a:pPr marL="0" indent="0">
               <a:buNone/>
             </a:pPr>
             <a:r>
@@ -8429,6 +8695,13 @@
             <a:prstDash val="solid"/>
           </a:ln>
         </p:spPr>
+        <p:txBody>
+          <a:bodyPr/>
+          <a:lstStyle/>
+          <a:p>
+            <a:endParaRPr lang="en-US"/>
+          </a:p>
+        </p:txBody>
       </p:sp>
       <p:sp>
         <p:nvSpPr>
@@ -8454,6 +8727,13 @@
             <a:prstDash val="solid"/>
           </a:ln>
         </p:spPr>
+        <p:txBody>
+          <a:bodyPr/>
+          <a:lstStyle/>
+          <a:p>
+            <a:endParaRPr lang="en-US"/>
+          </a:p>
+        </p:txBody>
       </p:sp>
       <p:sp>
         <p:nvSpPr>
@@ -8476,7 +8756,7 @@
           <a:bodyPr wrap="square" lIns="0" tIns="0" rIns="0" bIns="0" rtlCol="0" anchor="ctr"/>
           <a:lstStyle/>
           <a:p>
-            <a:pPr algn="ctr" indent="0" marL="0">
+            <a:pPr marL="0" indent="0" algn="ctr">
               <a:buNone/>
             </a:pPr>
             <a:r>
@@ -8512,7 +8792,7 @@
           <a:bodyPr wrap="square" lIns="25400" tIns="25400" rIns="25400" bIns="25400" rtlCol="0" anchor="ctr"/>
           <a:lstStyle/>
           <a:p>
-            <a:pPr indent="0" marL="0">
+            <a:pPr marL="0" indent="0">
               <a:buNone/>
             </a:pPr>
             <a:r>
@@ -8548,7 +8828,7 @@
           <a:bodyPr wrap="square" lIns="25400" tIns="25400" rIns="25400" bIns="25400" rtlCol="0" anchor="ctr"/>
           <a:lstStyle/>
           <a:p>
-            <a:pPr indent="0" marL="0">
+            <a:pPr marL="0" indent="0">
               <a:buNone/>
             </a:pPr>
             <a:r>
@@ -8587,6 +8867,13 @@
             <a:prstDash val="solid"/>
           </a:ln>
         </p:spPr>
+        <p:txBody>
+          <a:bodyPr/>
+          <a:lstStyle/>
+          <a:p>
+            <a:endParaRPr lang="en-US"/>
+          </a:p>
+        </p:txBody>
       </p:sp>
       <p:sp>
         <p:nvSpPr>
@@ -8612,6 +8899,13 @@
             <a:prstDash val="solid"/>
           </a:ln>
         </p:spPr>
+        <p:txBody>
+          <a:bodyPr/>
+          <a:lstStyle/>
+          <a:p>
+            <a:endParaRPr lang="en-US"/>
+          </a:p>
+        </p:txBody>
       </p:sp>
       <p:sp>
         <p:nvSpPr>
@@ -8634,7 +8928,7 @@
           <a:bodyPr wrap="square" lIns="0" tIns="0" rIns="0" bIns="0" rtlCol="0" anchor="ctr"/>
           <a:lstStyle/>
           <a:p>
-            <a:pPr algn="ctr" indent="0" marL="0">
+            <a:pPr marL="0" indent="0" algn="ctr">
               <a:buNone/>
             </a:pPr>
             <a:r>
@@ -8670,7 +8964,7 @@
           <a:bodyPr wrap="square" lIns="25400" tIns="25400" rIns="25400" bIns="25400" rtlCol="0" anchor="ctr"/>
           <a:lstStyle/>
           <a:p>
-            <a:pPr indent="0" marL="0">
+            <a:pPr marL="0" indent="0">
               <a:buNone/>
             </a:pPr>
             <a:r>
@@ -8706,7 +9000,7 @@
           <a:bodyPr wrap="square" lIns="25400" tIns="25400" rIns="25400" bIns="25400" rtlCol="0" anchor="ctr"/>
           <a:lstStyle/>
           <a:p>
-            <a:pPr indent="0" marL="0">
+            <a:pPr marL="0" indent="0">
               <a:buNone/>
             </a:pPr>
             <a:r>
@@ -8745,6 +9039,13 @@
             <a:prstDash val="solid"/>
           </a:ln>
         </p:spPr>
+        <p:txBody>
+          <a:bodyPr/>
+          <a:lstStyle/>
+          <a:p>
+            <a:endParaRPr lang="en-US"/>
+          </a:p>
+        </p:txBody>
       </p:sp>
       <p:sp>
         <p:nvSpPr>
@@ -8770,6 +9071,13 @@
             <a:prstDash val="solid"/>
           </a:ln>
         </p:spPr>
+        <p:txBody>
+          <a:bodyPr/>
+          <a:lstStyle/>
+          <a:p>
+            <a:endParaRPr lang="en-US"/>
+          </a:p>
+        </p:txBody>
       </p:sp>
       <p:sp>
         <p:nvSpPr>
@@ -8792,7 +9100,7 @@
           <a:bodyPr wrap="square" lIns="0" tIns="0" rIns="0" bIns="0" rtlCol="0" anchor="ctr"/>
           <a:lstStyle/>
           <a:p>
-            <a:pPr algn="ctr" indent="0" marL="0">
+            <a:pPr marL="0" indent="0" algn="ctr">
               <a:buNone/>
             </a:pPr>
             <a:r>
@@ -8828,7 +9136,7 @@
           <a:bodyPr wrap="square" lIns="25400" tIns="25400" rIns="25400" bIns="25400" rtlCol="0" anchor="ctr"/>
           <a:lstStyle/>
           <a:p>
-            <a:pPr indent="0" marL="0">
+            <a:pPr marL="0" indent="0">
               <a:buNone/>
             </a:pPr>
             <a:r>
@@ -8864,7 +9172,7 @@
           <a:bodyPr wrap="square" lIns="25400" tIns="25400" rIns="25400" bIns="25400" rtlCol="0" anchor="ctr"/>
           <a:lstStyle/>
           <a:p>
-            <a:pPr indent="0" marL="0">
+            <a:pPr marL="0" indent="0">
               <a:buNone/>
             </a:pPr>
             <a:r>
@@ -8903,6 +9211,13 @@
             <a:prstDash val="solid"/>
           </a:ln>
         </p:spPr>
+        <p:txBody>
+          <a:bodyPr/>
+          <a:lstStyle/>
+          <a:p>
+            <a:endParaRPr lang="en-US"/>
+          </a:p>
+        </p:txBody>
       </p:sp>
       <p:sp>
         <p:nvSpPr>
@@ -8928,6 +9243,13 @@
             <a:prstDash val="solid"/>
           </a:ln>
         </p:spPr>
+        <p:txBody>
+          <a:bodyPr/>
+          <a:lstStyle/>
+          <a:p>
+            <a:endParaRPr lang="en-US"/>
+          </a:p>
+        </p:txBody>
       </p:sp>
       <p:sp>
         <p:nvSpPr>
@@ -8950,7 +9272,7 @@
           <a:bodyPr wrap="square" lIns="0" tIns="0" rIns="0" bIns="0" rtlCol="0" anchor="ctr"/>
           <a:lstStyle/>
           <a:p>
-            <a:pPr algn="ctr" indent="0" marL="0">
+            <a:pPr marL="0" indent="0" algn="ctr">
               <a:buNone/>
             </a:pPr>
             <a:r>
@@ -8986,7 +9308,7 @@
           <a:bodyPr wrap="square" lIns="25400" tIns="25400" rIns="25400" bIns="25400" rtlCol="0" anchor="ctr"/>
           <a:lstStyle/>
           <a:p>
-            <a:pPr indent="0" marL="0">
+            <a:pPr marL="0" indent="0">
               <a:buNone/>
             </a:pPr>
             <a:r>
@@ -9022,7 +9344,7 @@
           <a:bodyPr wrap="square" lIns="25400" tIns="25400" rIns="25400" bIns="25400" rtlCol="0" anchor="ctr"/>
           <a:lstStyle/>
           <a:p>
-            <a:pPr indent="0" marL="0">
+            <a:pPr marL="0" indent="0">
               <a:buNone/>
             </a:pPr>
             <a:r>
@@ -9061,6 +9383,13 @@
             <a:prstDash val="solid"/>
           </a:ln>
         </p:spPr>
+        <p:txBody>
+          <a:bodyPr/>
+          <a:lstStyle/>
+          <a:p>
+            <a:endParaRPr lang="en-US"/>
+          </a:p>
+        </p:txBody>
       </p:sp>
       <p:sp>
         <p:nvSpPr>
@@ -9086,6 +9415,13 @@
             <a:prstDash val="solid"/>
           </a:ln>
         </p:spPr>
+        <p:txBody>
+          <a:bodyPr/>
+          <a:lstStyle/>
+          <a:p>
+            <a:endParaRPr lang="en-US"/>
+          </a:p>
+        </p:txBody>
       </p:sp>
       <p:sp>
         <p:nvSpPr>
@@ -9108,7 +9444,7 @@
           <a:bodyPr wrap="square" lIns="0" tIns="0" rIns="0" bIns="0" rtlCol="0" anchor="ctr"/>
           <a:lstStyle/>
           <a:p>
-            <a:pPr algn="ctr" indent="0" marL="0">
+            <a:pPr marL="0" indent="0" algn="ctr">
               <a:buNone/>
             </a:pPr>
             <a:r>
@@ -9144,7 +9480,7 @@
           <a:bodyPr wrap="square" lIns="25400" tIns="25400" rIns="25400" bIns="25400" rtlCol="0" anchor="ctr"/>
           <a:lstStyle/>
           <a:p>
-            <a:pPr indent="0" marL="0">
+            <a:pPr marL="0" indent="0">
               <a:buNone/>
             </a:pPr>
             <a:r>
@@ -9180,7 +9516,7 @@
           <a:bodyPr wrap="square" lIns="25400" tIns="25400" rIns="25400" bIns="25400" rtlCol="0" anchor="ctr"/>
           <a:lstStyle/>
           <a:p>
-            <a:pPr indent="0" marL="0">
+            <a:pPr marL="0" indent="0">
               <a:buNone/>
             </a:pPr>
             <a:r>
@@ -9219,6 +9555,13 @@
             <a:prstDash val="solid"/>
           </a:ln>
         </p:spPr>
+        <p:txBody>
+          <a:bodyPr/>
+          <a:lstStyle/>
+          <a:p>
+            <a:endParaRPr lang="en-US"/>
+          </a:p>
+        </p:txBody>
       </p:sp>
       <p:sp>
         <p:nvSpPr>
@@ -9244,6 +9587,13 @@
             <a:prstDash val="solid"/>
           </a:ln>
         </p:spPr>
+        <p:txBody>
+          <a:bodyPr/>
+          <a:lstStyle/>
+          <a:p>
+            <a:endParaRPr lang="en-US"/>
+          </a:p>
+        </p:txBody>
       </p:sp>
       <p:sp>
         <p:nvSpPr>
@@ -9266,7 +9616,7 @@
           <a:bodyPr wrap="square" lIns="0" tIns="0" rIns="0" bIns="0" rtlCol="0" anchor="ctr"/>
           <a:lstStyle/>
           <a:p>
-            <a:pPr algn="ctr" indent="0" marL="0">
+            <a:pPr marL="0" indent="0" algn="ctr">
               <a:buNone/>
             </a:pPr>
             <a:r>
@@ -9302,7 +9652,7 @@
           <a:bodyPr wrap="square" lIns="25400" tIns="25400" rIns="25400" bIns="25400" rtlCol="0" anchor="ctr"/>
           <a:lstStyle/>
           <a:p>
-            <a:pPr indent="0" marL="0">
+            <a:pPr marL="0" indent="0">
               <a:buNone/>
             </a:pPr>
             <a:r>
@@ -9338,7 +9688,7 @@
           <a:bodyPr wrap="square" lIns="25400" tIns="25400" rIns="25400" bIns="25400" rtlCol="0" anchor="ctr"/>
           <a:lstStyle/>
           <a:p>
-            <a:pPr indent="0" marL="0">
+            <a:pPr marL="0" indent="0">
               <a:buNone/>
             </a:pPr>
             <a:r>
@@ -9377,6 +9727,13 @@
             <a:prstDash val="solid"/>
           </a:ln>
         </p:spPr>
+        <p:txBody>
+          <a:bodyPr/>
+          <a:lstStyle/>
+          <a:p>
+            <a:endParaRPr lang="en-US"/>
+          </a:p>
+        </p:txBody>
       </p:sp>
       <p:sp>
         <p:nvSpPr>
@@ -9402,6 +9759,13 @@
             <a:prstDash val="solid"/>
           </a:ln>
         </p:spPr>
+        <p:txBody>
+          <a:bodyPr/>
+          <a:lstStyle/>
+          <a:p>
+            <a:endParaRPr lang="en-US"/>
+          </a:p>
+        </p:txBody>
       </p:sp>
       <p:sp>
         <p:nvSpPr>
@@ -9424,7 +9788,7 @@
           <a:bodyPr wrap="square" lIns="0" tIns="0" rIns="0" bIns="0" rtlCol="0" anchor="ctr"/>
           <a:lstStyle/>
           <a:p>
-            <a:pPr algn="ctr" indent="0" marL="0">
+            <a:pPr marL="0" indent="0" algn="ctr">
               <a:buNone/>
             </a:pPr>
             <a:r>
@@ -9460,7 +9824,7 @@
           <a:bodyPr wrap="square" lIns="25400" tIns="25400" rIns="25400" bIns="25400" rtlCol="0" anchor="ctr"/>
           <a:lstStyle/>
           <a:p>
-            <a:pPr indent="0" marL="0">
+            <a:pPr marL="0" indent="0">
               <a:buNone/>
             </a:pPr>
             <a:r>
@@ -9496,7 +9860,7 @@
           <a:bodyPr wrap="square" lIns="25400" tIns="25400" rIns="25400" bIns="25400" rtlCol="0" anchor="ctr"/>
           <a:lstStyle/>
           <a:p>
-            <a:pPr indent="0" marL="0">
+            <a:pPr marL="0" indent="0">
               <a:buNone/>
             </a:pPr>
             <a:r>
@@ -9535,6 +9899,13 @@
             <a:prstDash val="solid"/>
           </a:ln>
         </p:spPr>
+        <p:txBody>
+          <a:bodyPr/>
+          <a:lstStyle/>
+          <a:p>
+            <a:endParaRPr lang="en-US"/>
+          </a:p>
+        </p:txBody>
       </p:sp>
       <p:sp>
         <p:nvSpPr>
@@ -9560,6 +9931,13 @@
             <a:prstDash val="solid"/>
           </a:ln>
         </p:spPr>
+        <p:txBody>
+          <a:bodyPr/>
+          <a:lstStyle/>
+          <a:p>
+            <a:endParaRPr lang="en-US"/>
+          </a:p>
+        </p:txBody>
       </p:sp>
       <p:sp>
         <p:nvSpPr>
@@ -9582,7 +9960,7 @@
           <a:bodyPr wrap="square" lIns="0" tIns="0" rIns="0" bIns="0" rtlCol="0" anchor="ctr"/>
           <a:lstStyle/>
           <a:p>
-            <a:pPr algn="ctr" indent="0" marL="0">
+            <a:pPr marL="0" indent="0" algn="ctr">
               <a:buNone/>
             </a:pPr>
             <a:r>
@@ -9618,7 +9996,7 @@
           <a:bodyPr wrap="square" lIns="25400" tIns="25400" rIns="25400" bIns="25400" rtlCol="0" anchor="ctr"/>
           <a:lstStyle/>
           <a:p>
-            <a:pPr indent="0" marL="0">
+            <a:pPr marL="0" indent="0">
               <a:buNone/>
             </a:pPr>
             <a:r>
@@ -9654,7 +10032,7 @@
           <a:bodyPr wrap="square" lIns="25400" tIns="25400" rIns="25400" bIns="25400" rtlCol="0" anchor="ctr"/>
           <a:lstStyle/>
           <a:p>
-            <a:pPr indent="0" marL="0">
+            <a:pPr marL="0" indent="0">
               <a:buNone/>
             </a:pPr>
             <a:r>
@@ -9693,6 +10071,13 @@
             <a:prstDash val="solid"/>
           </a:ln>
         </p:spPr>
+        <p:txBody>
+          <a:bodyPr/>
+          <a:lstStyle/>
+          <a:p>
+            <a:endParaRPr lang="en-US"/>
+          </a:p>
+        </p:txBody>
       </p:sp>
       <p:sp>
         <p:nvSpPr>
@@ -9715,7 +10100,7 @@
           <a:bodyPr wrap="square" lIns="0" tIns="0" rIns="0" bIns="0" rtlCol="0" anchor="ctr"/>
           <a:lstStyle/>
           <a:p>
-            <a:pPr indent="0" marL="0">
+            <a:pPr marL="0" indent="0">
               <a:buNone/>
             </a:pPr>
             <a:r>
@@ -9746,6 +10131,7 @@
         <a:solidFill>
           <a:srgbClr val="F4F6FA"/>
         </a:solidFill>
+        <a:effectLst/>
       </p:bgPr>
     </p:bg>
     <p:spTree>
@@ -9786,6 +10172,13 @@
             <a:prstDash val="solid"/>
           </a:ln>
         </p:spPr>
+        <p:txBody>
+          <a:bodyPr/>
+          <a:lstStyle/>
+          <a:p>
+            <a:endParaRPr lang="en-US"/>
+          </a:p>
+        </p:txBody>
       </p:sp>
       <p:sp>
         <p:nvSpPr>
@@ -9808,7 +10201,7 @@
           <a:bodyPr wrap="square" lIns="0" tIns="0" rIns="0" bIns="0" rtlCol="0" anchor="ctr"/>
           <a:lstStyle/>
           <a:p>
-            <a:pPr indent="0" marL="0">
+            <a:pPr marL="0" indent="0">
               <a:buNone/>
             </a:pPr>
             <a:r>
@@ -9847,6 +10240,13 @@
             <a:prstDash val="solid"/>
           </a:ln>
         </p:spPr>
+        <p:txBody>
+          <a:bodyPr/>
+          <a:lstStyle/>
+          <a:p>
+            <a:endParaRPr lang="en-US"/>
+          </a:p>
+        </p:txBody>
       </p:sp>
       <p:sp>
         <p:nvSpPr>
@@ -9872,6 +10272,13 @@
             <a:prstDash val="solid"/>
           </a:ln>
         </p:spPr>
+        <p:txBody>
+          <a:bodyPr/>
+          <a:lstStyle/>
+          <a:p>
+            <a:endParaRPr lang="en-US"/>
+          </a:p>
+        </p:txBody>
       </p:sp>
       <p:sp>
         <p:nvSpPr>
@@ -9894,7 +10301,7 @@
           <a:bodyPr wrap="square" lIns="0" tIns="0" rIns="0" bIns="0" rtlCol="0" anchor="ctr"/>
           <a:lstStyle/>
           <a:p>
-            <a:pPr algn="ctr" indent="0" marL="0">
+            <a:pPr marL="0" indent="0" algn="ctr">
               <a:buNone/>
             </a:pPr>
             <a:r>
@@ -9930,7 +10337,7 @@
           <a:bodyPr wrap="square" lIns="0" tIns="0" rIns="0" bIns="0" rtlCol="0" anchor="ctr"/>
           <a:lstStyle/>
           <a:p>
-            <a:pPr indent="0" marL="0">
+            <a:pPr marL="0" indent="0">
               <a:buNone/>
             </a:pPr>
             <a:r>
@@ -9966,7 +10373,7 @@
           <a:bodyPr wrap="square" lIns="0" tIns="0" rIns="0" bIns="0" rtlCol="0" anchor="ctr"/>
           <a:lstStyle/>
           <a:p>
-            <a:pPr indent="0" marL="0">
+            <a:pPr marL="0" indent="0">
               <a:buNone/>
             </a:pPr>
             <a:r>
@@ -10005,6 +10412,13 @@
             <a:prstDash val="solid"/>
           </a:ln>
         </p:spPr>
+        <p:txBody>
+          <a:bodyPr/>
+          <a:lstStyle/>
+          <a:p>
+            <a:endParaRPr lang="en-US"/>
+          </a:p>
+        </p:txBody>
       </p:sp>
       <p:sp>
         <p:nvSpPr>
@@ -10030,6 +10444,13 @@
             <a:prstDash val="solid"/>
           </a:ln>
         </p:spPr>
+        <p:txBody>
+          <a:bodyPr/>
+          <a:lstStyle/>
+          <a:p>
+            <a:endParaRPr lang="en-US"/>
+          </a:p>
+        </p:txBody>
       </p:sp>
       <p:sp>
         <p:nvSpPr>
@@ -10052,7 +10473,7 @@
           <a:bodyPr wrap="square" lIns="0" tIns="0" rIns="0" bIns="0" rtlCol="0" anchor="ctr"/>
           <a:lstStyle/>
           <a:p>
-            <a:pPr algn="ctr" indent="0" marL="0">
+            <a:pPr marL="0" indent="0" algn="ctr">
               <a:buNone/>
             </a:pPr>
             <a:r>
@@ -10088,7 +10509,7 @@
           <a:bodyPr wrap="square" lIns="0" tIns="0" rIns="0" bIns="0" rtlCol="0" anchor="ctr"/>
           <a:lstStyle/>
           <a:p>
-            <a:pPr indent="0" marL="0">
+            <a:pPr marL="0" indent="0">
               <a:buNone/>
             </a:pPr>
             <a:r>
@@ -10124,7 +10545,7 @@
           <a:bodyPr wrap="square" lIns="0" tIns="0" rIns="0" bIns="0" rtlCol="0" anchor="ctr"/>
           <a:lstStyle/>
           <a:p>
-            <a:pPr indent="0" marL="0">
+            <a:pPr marL="0" indent="0">
               <a:buNone/>
             </a:pPr>
             <a:r>
@@ -10163,6 +10584,13 @@
             <a:prstDash val="solid"/>
           </a:ln>
         </p:spPr>
+        <p:txBody>
+          <a:bodyPr/>
+          <a:lstStyle/>
+          <a:p>
+            <a:endParaRPr lang="en-US"/>
+          </a:p>
+        </p:txBody>
       </p:sp>
       <p:sp>
         <p:nvSpPr>
@@ -10188,6 +10616,13 @@
             <a:prstDash val="solid"/>
           </a:ln>
         </p:spPr>
+        <p:txBody>
+          <a:bodyPr/>
+          <a:lstStyle/>
+          <a:p>
+            <a:endParaRPr lang="en-US"/>
+          </a:p>
+        </p:txBody>
       </p:sp>
       <p:sp>
         <p:nvSpPr>
@@ -10210,7 +10645,7 @@
           <a:bodyPr wrap="square" lIns="0" tIns="0" rIns="0" bIns="0" rtlCol="0" anchor="ctr"/>
           <a:lstStyle/>
           <a:p>
-            <a:pPr algn="ctr" indent="0" marL="0">
+            <a:pPr marL="0" indent="0" algn="ctr">
               <a:buNone/>
             </a:pPr>
             <a:r>
@@ -10246,7 +10681,7 @@
           <a:bodyPr wrap="square" lIns="0" tIns="0" rIns="0" bIns="0" rtlCol="0" anchor="ctr"/>
           <a:lstStyle/>
           <a:p>
-            <a:pPr indent="0" marL="0">
+            <a:pPr marL="0" indent="0">
               <a:buNone/>
             </a:pPr>
             <a:r>
@@ -10282,7 +10717,7 @@
           <a:bodyPr wrap="square" lIns="0" tIns="0" rIns="0" bIns="0" rtlCol="0" anchor="ctr"/>
           <a:lstStyle/>
           <a:p>
-            <a:pPr indent="0" marL="0">
+            <a:pPr marL="0" indent="0">
               <a:buNone/>
             </a:pPr>
             <a:r>
@@ -10321,6 +10756,13 @@
             <a:prstDash val="solid"/>
           </a:ln>
         </p:spPr>
+        <p:txBody>
+          <a:bodyPr/>
+          <a:lstStyle/>
+          <a:p>
+            <a:endParaRPr lang="en-US"/>
+          </a:p>
+        </p:txBody>
       </p:sp>
       <p:sp>
         <p:nvSpPr>
@@ -10346,6 +10788,13 @@
             <a:prstDash val="solid"/>
           </a:ln>
         </p:spPr>
+        <p:txBody>
+          <a:bodyPr/>
+          <a:lstStyle/>
+          <a:p>
+            <a:endParaRPr lang="en-US"/>
+          </a:p>
+        </p:txBody>
       </p:sp>
       <p:sp>
         <p:nvSpPr>
@@ -10368,7 +10817,7 @@
           <a:bodyPr wrap="square" lIns="0" tIns="0" rIns="0" bIns="0" rtlCol="0" anchor="ctr"/>
           <a:lstStyle/>
           <a:p>
-            <a:pPr algn="ctr" indent="0" marL="0">
+            <a:pPr marL="0" indent="0" algn="ctr">
               <a:buNone/>
             </a:pPr>
             <a:r>
@@ -10404,7 +10853,7 @@
           <a:bodyPr wrap="square" lIns="0" tIns="0" rIns="0" bIns="0" rtlCol="0" anchor="ctr"/>
           <a:lstStyle/>
           <a:p>
-            <a:pPr indent="0" marL="0">
+            <a:pPr marL="0" indent="0">
               <a:buNone/>
             </a:pPr>
             <a:r>
@@ -10440,7 +10889,7 @@
           <a:bodyPr wrap="square" lIns="0" tIns="0" rIns="0" bIns="0" rtlCol="0" anchor="ctr"/>
           <a:lstStyle/>
           <a:p>
-            <a:pPr indent="0" marL="0">
+            <a:pPr marL="0" indent="0">
               <a:buNone/>
             </a:pPr>
             <a:r>
@@ -10479,6 +10928,13 @@
             <a:prstDash val="solid"/>
           </a:ln>
         </p:spPr>
+        <p:txBody>
+          <a:bodyPr/>
+          <a:lstStyle/>
+          <a:p>
+            <a:endParaRPr lang="en-US"/>
+          </a:p>
+        </p:txBody>
       </p:sp>
       <p:sp>
         <p:nvSpPr>
@@ -10504,6 +10960,13 @@
             <a:prstDash val="solid"/>
           </a:ln>
         </p:spPr>
+        <p:txBody>
+          <a:bodyPr/>
+          <a:lstStyle/>
+          <a:p>
+            <a:endParaRPr lang="en-US"/>
+          </a:p>
+        </p:txBody>
       </p:sp>
       <p:sp>
         <p:nvSpPr>
@@ -10526,7 +10989,7 @@
           <a:bodyPr wrap="square" lIns="0" tIns="0" rIns="0" bIns="0" rtlCol="0" anchor="ctr"/>
           <a:lstStyle/>
           <a:p>
-            <a:pPr algn="ctr" indent="0" marL="0">
+            <a:pPr marL="0" indent="0" algn="ctr">
               <a:buNone/>
             </a:pPr>
             <a:r>
@@ -10562,7 +11025,7 @@
           <a:bodyPr wrap="square" lIns="0" tIns="0" rIns="0" bIns="0" rtlCol="0" anchor="ctr"/>
           <a:lstStyle/>
           <a:p>
-            <a:pPr indent="0" marL="0">
+            <a:pPr marL="0" indent="0">
               <a:buNone/>
             </a:pPr>
             <a:r>
@@ -10598,7 +11061,7 @@
           <a:bodyPr wrap="square" lIns="0" tIns="0" rIns="0" bIns="0" rtlCol="0" anchor="ctr"/>
           <a:lstStyle/>
           <a:p>
-            <a:pPr indent="0" marL="0">
+            <a:pPr marL="0" indent="0">
               <a:buNone/>
             </a:pPr>
             <a:r>
@@ -10637,6 +11100,13 @@
             <a:prstDash val="solid"/>
           </a:ln>
         </p:spPr>
+        <p:txBody>
+          <a:bodyPr/>
+          <a:lstStyle/>
+          <a:p>
+            <a:endParaRPr lang="en-US"/>
+          </a:p>
+        </p:txBody>
       </p:sp>
       <p:sp>
         <p:nvSpPr>
@@ -10662,6 +11132,13 @@
             <a:prstDash val="solid"/>
           </a:ln>
         </p:spPr>
+        <p:txBody>
+          <a:bodyPr/>
+          <a:lstStyle/>
+          <a:p>
+            <a:endParaRPr lang="en-US"/>
+          </a:p>
+        </p:txBody>
       </p:sp>
       <p:sp>
         <p:nvSpPr>
@@ -10684,7 +11161,7 @@
           <a:bodyPr wrap="square" lIns="0" tIns="0" rIns="0" bIns="0" rtlCol="0" anchor="ctr"/>
           <a:lstStyle/>
           <a:p>
-            <a:pPr algn="ctr" indent="0" marL="0">
+            <a:pPr marL="0" indent="0" algn="ctr">
               <a:buNone/>
             </a:pPr>
             <a:r>
@@ -10720,7 +11197,7 @@
           <a:bodyPr wrap="square" lIns="0" tIns="0" rIns="0" bIns="0" rtlCol="0" anchor="ctr"/>
           <a:lstStyle/>
           <a:p>
-            <a:pPr indent="0" marL="0">
+            <a:pPr marL="0" indent="0">
               <a:buNone/>
             </a:pPr>
             <a:r>
@@ -10756,7 +11233,7 @@
           <a:bodyPr wrap="square" lIns="0" tIns="0" rIns="0" bIns="0" rtlCol="0" anchor="ctr"/>
           <a:lstStyle/>
           <a:p>
-            <a:pPr indent="0" marL="0">
+            <a:pPr marL="0" indent="0">
               <a:buNone/>
             </a:pPr>
             <a:r>
@@ -10795,6 +11272,13 @@
             <a:prstDash val="solid"/>
           </a:ln>
         </p:spPr>
+        <p:txBody>
+          <a:bodyPr/>
+          <a:lstStyle/>
+          <a:p>
+            <a:endParaRPr lang="en-US"/>
+          </a:p>
+        </p:txBody>
       </p:sp>
       <p:sp>
         <p:nvSpPr>
@@ -10820,6 +11304,13 @@
             <a:prstDash val="solid"/>
           </a:ln>
         </p:spPr>
+        <p:txBody>
+          <a:bodyPr/>
+          <a:lstStyle/>
+          <a:p>
+            <a:endParaRPr lang="en-US"/>
+          </a:p>
+        </p:txBody>
       </p:sp>
       <p:sp>
         <p:nvSpPr>
@@ -10842,7 +11333,7 @@
           <a:bodyPr wrap="square" lIns="0" tIns="0" rIns="0" bIns="0" rtlCol="0" anchor="ctr"/>
           <a:lstStyle/>
           <a:p>
-            <a:pPr algn="ctr" indent="0" marL="0">
+            <a:pPr marL="0" indent="0" algn="ctr">
               <a:buNone/>
             </a:pPr>
             <a:r>
@@ -10878,7 +11369,7 @@
           <a:bodyPr wrap="square" lIns="0" tIns="0" rIns="0" bIns="0" rtlCol="0" anchor="ctr"/>
           <a:lstStyle/>
           <a:p>
-            <a:pPr indent="0" marL="0">
+            <a:pPr marL="0" indent="0">
               <a:buNone/>
             </a:pPr>
             <a:r>
@@ -10914,7 +11405,7 @@
           <a:bodyPr wrap="square" lIns="0" tIns="0" rIns="0" bIns="0" rtlCol="0" anchor="ctr"/>
           <a:lstStyle/>
           <a:p>
-            <a:pPr indent="0" marL="0">
+            <a:pPr marL="0" indent="0">
               <a:buNone/>
             </a:pPr>
             <a:r>
@@ -10953,6 +11444,13 @@
             <a:prstDash val="solid"/>
           </a:ln>
         </p:spPr>
+        <p:txBody>
+          <a:bodyPr/>
+          <a:lstStyle/>
+          <a:p>
+            <a:endParaRPr lang="en-US"/>
+          </a:p>
+        </p:txBody>
       </p:sp>
       <p:sp>
         <p:nvSpPr>
@@ -10975,7 +11473,7 @@
           <a:bodyPr wrap="square" lIns="0" tIns="0" rIns="0" bIns="0" rtlCol="0" anchor="ctr"/>
           <a:lstStyle/>
           <a:p>
-            <a:pPr indent="0" marL="0">
+            <a:pPr marL="0" indent="0">
               <a:buNone/>
             </a:pPr>
             <a:r>
@@ -11006,6 +11504,7 @@
         <a:solidFill>
           <a:srgbClr val="F4F6FA"/>
         </a:solidFill>
+        <a:effectLst/>
       </p:bgPr>
     </p:bg>
     <p:spTree>
@@ -11046,6 +11545,13 @@
             <a:prstDash val="solid"/>
           </a:ln>
         </p:spPr>
+        <p:txBody>
+          <a:bodyPr/>
+          <a:lstStyle/>
+          <a:p>
+            <a:endParaRPr lang="en-US"/>
+          </a:p>
+        </p:txBody>
       </p:sp>
       <p:sp>
         <p:nvSpPr>
@@ -11068,7 +11574,7 @@
           <a:bodyPr wrap="square" lIns="0" tIns="0" rIns="0" bIns="0" rtlCol="0" anchor="ctr"/>
           <a:lstStyle/>
           <a:p>
-            <a:pPr indent="0" marL="0">
+            <a:pPr marL="0" indent="0">
               <a:buNone/>
             </a:pPr>
             <a:r>
@@ -11107,6 +11613,13 @@
             <a:prstDash val="solid"/>
           </a:ln>
         </p:spPr>
+        <p:txBody>
+          <a:bodyPr/>
+          <a:lstStyle/>
+          <a:p>
+            <a:endParaRPr lang="en-US"/>
+          </a:p>
+        </p:txBody>
       </p:sp>
       <p:sp>
         <p:nvSpPr>
@@ -11129,11 +11642,11 @@
           <a:bodyPr wrap="square" lIns="0" tIns="0" rIns="0" bIns="0" rtlCol="0" anchor="ctr"/>
           <a:lstStyle/>
           <a:p>
-            <a:pPr algn="ctr" indent="0" marL="0">
-              <a:buNone/>
-            </a:pPr>
-            <a:r>
-              <a:rPr lang="en-US" sz="900" b="1" spc="200" kern="0" dirty="0">
+            <a:pPr marL="0" indent="0" algn="ctr">
+              <a:buNone/>
+            </a:pPr>
+            <a:r>
+              <a:rPr lang="en-US" sz="900" b="1" kern="0" spc="200" dirty="0">
                 <a:solidFill>
                   <a:srgbClr val="FFFFFF"/>
                 </a:solidFill>
@@ -11165,7 +11678,7 @@
           <a:bodyPr wrap="square" lIns="0" tIns="0" rIns="0" bIns="0" rtlCol="0" anchor="ctr"/>
           <a:lstStyle/>
           <a:p>
-            <a:pPr algn="ctr" indent="0" marL="0">
+            <a:pPr marL="0" indent="0" algn="ctr">
               <a:buNone/>
             </a:pPr>
             <a:r>
@@ -11204,6 +11717,13 @@
             <a:prstDash val="solid"/>
           </a:ln>
         </p:spPr>
+        <p:txBody>
+          <a:bodyPr/>
+          <a:lstStyle/>
+          <a:p>
+            <a:endParaRPr lang="en-US"/>
+          </a:p>
+        </p:txBody>
       </p:sp>
       <p:sp>
         <p:nvSpPr>
@@ -11377,6 +11897,13 @@
             <a:prstDash val="solid"/>
           </a:ln>
         </p:spPr>
+        <p:txBody>
+          <a:bodyPr/>
+          <a:lstStyle/>
+          <a:p>
+            <a:endParaRPr lang="en-US"/>
+          </a:p>
+        </p:txBody>
       </p:sp>
       <p:sp>
         <p:nvSpPr>
@@ -11399,11 +11926,11 @@
           <a:bodyPr wrap="square" lIns="0" tIns="0" rIns="0" bIns="0" rtlCol="0" anchor="ctr"/>
           <a:lstStyle/>
           <a:p>
-            <a:pPr algn="ctr" indent="0" marL="0">
-              <a:buNone/>
-            </a:pPr>
-            <a:r>
-              <a:rPr lang="en-US" sz="900" b="1" spc="200" kern="0" dirty="0">
+            <a:pPr marL="0" indent="0" algn="ctr">
+              <a:buNone/>
+            </a:pPr>
+            <a:r>
+              <a:rPr lang="en-US" sz="900" b="1" kern="0" spc="200" dirty="0">
                 <a:solidFill>
                   <a:srgbClr val="FFFFFF"/>
                 </a:solidFill>
@@ -11435,7 +11962,7 @@
           <a:bodyPr wrap="square" lIns="0" tIns="0" rIns="0" bIns="0" rtlCol="0" anchor="ctr"/>
           <a:lstStyle/>
           <a:p>
-            <a:pPr algn="ctr" indent="0" marL="0">
+            <a:pPr marL="0" indent="0" algn="ctr">
               <a:buNone/>
             </a:pPr>
             <a:r>
@@ -11474,6 +12001,13 @@
             <a:prstDash val="solid"/>
           </a:ln>
         </p:spPr>
+        <p:txBody>
+          <a:bodyPr/>
+          <a:lstStyle/>
+          <a:p>
+            <a:endParaRPr lang="en-US"/>
+          </a:p>
+        </p:txBody>
       </p:sp>
       <p:sp>
         <p:nvSpPr>
@@ -11629,6 +12163,13 @@
             <a:prstDash val="solid"/>
           </a:ln>
         </p:spPr>
+        <p:txBody>
+          <a:bodyPr/>
+          <a:lstStyle/>
+          <a:p>
+            <a:endParaRPr lang="en-US"/>
+          </a:p>
+        </p:txBody>
       </p:sp>
       <p:sp>
         <p:nvSpPr>
@@ -11651,11 +12192,11 @@
           <a:bodyPr wrap="square" lIns="0" tIns="0" rIns="0" bIns="0" rtlCol="0" anchor="ctr"/>
           <a:lstStyle/>
           <a:p>
-            <a:pPr algn="ctr" indent="0" marL="0">
-              <a:buNone/>
-            </a:pPr>
-            <a:r>
-              <a:rPr lang="en-US" sz="900" b="1" spc="200" kern="0" dirty="0">
+            <a:pPr marL="0" indent="0" algn="ctr">
+              <a:buNone/>
+            </a:pPr>
+            <a:r>
+              <a:rPr lang="en-US" sz="900" b="1" kern="0" spc="200" dirty="0">
                 <a:solidFill>
                   <a:srgbClr val="FFFFFF"/>
                 </a:solidFill>
@@ -11687,7 +12228,7 @@
           <a:bodyPr wrap="square" lIns="0" tIns="0" rIns="0" bIns="0" rtlCol="0" anchor="ctr"/>
           <a:lstStyle/>
           <a:p>
-            <a:pPr algn="ctr" indent="0" marL="0">
+            <a:pPr marL="0" indent="0" algn="ctr">
               <a:buNone/>
             </a:pPr>
             <a:r>
@@ -11726,6 +12267,13 @@
             <a:prstDash val="solid"/>
           </a:ln>
         </p:spPr>
+        <p:txBody>
+          <a:bodyPr/>
+          <a:lstStyle/>
+          <a:p>
+            <a:endParaRPr lang="en-US"/>
+          </a:p>
+        </p:txBody>
       </p:sp>
       <p:sp>
         <p:nvSpPr>
@@ -11863,6 +12411,13 @@
             <a:prstDash val="solid"/>
           </a:ln>
         </p:spPr>
+        <p:txBody>
+          <a:bodyPr/>
+          <a:lstStyle/>
+          <a:p>
+            <a:endParaRPr lang="en-US"/>
+          </a:p>
+        </p:txBody>
       </p:sp>
       <p:sp>
         <p:nvSpPr>
@@ -11885,11 +12440,11 @@
           <a:bodyPr wrap="square" lIns="0" tIns="0" rIns="0" bIns="0" rtlCol="0" anchor="ctr"/>
           <a:lstStyle/>
           <a:p>
-            <a:pPr algn="ctr" indent="0" marL="0">
-              <a:buNone/>
-            </a:pPr>
-            <a:r>
-              <a:rPr lang="en-US" sz="900" b="1" spc="200" kern="0" dirty="0">
+            <a:pPr marL="0" indent="0" algn="ctr">
+              <a:buNone/>
+            </a:pPr>
+            <a:r>
+              <a:rPr lang="en-US" sz="900" b="1" kern="0" spc="200" dirty="0">
                 <a:solidFill>
                   <a:srgbClr val="FFFFFF"/>
                 </a:solidFill>
@@ -11921,7 +12476,7 @@
           <a:bodyPr wrap="square" lIns="0" tIns="0" rIns="0" bIns="0" rtlCol="0" anchor="ctr"/>
           <a:lstStyle/>
           <a:p>
-            <a:pPr algn="ctr" indent="0" marL="0">
+            <a:pPr marL="0" indent="0" algn="ctr">
               <a:buNone/>
             </a:pPr>
             <a:r>
@@ -11960,6 +12515,13 @@
             <a:prstDash val="solid"/>
           </a:ln>
         </p:spPr>
+        <p:txBody>
+          <a:bodyPr/>
+          <a:lstStyle/>
+          <a:p>
+            <a:endParaRPr lang="en-US"/>
+          </a:p>
+        </p:txBody>
       </p:sp>
       <p:sp>
         <p:nvSpPr>
@@ -12097,6 +12659,13 @@
             <a:prstDash val="solid"/>
           </a:ln>
         </p:spPr>
+        <p:txBody>
+          <a:bodyPr/>
+          <a:lstStyle/>
+          <a:p>
+            <a:endParaRPr lang="en-US"/>
+          </a:p>
+        </p:txBody>
       </p:sp>
       <p:sp>
         <p:nvSpPr>
@@ -12119,7 +12688,7 @@
           <a:bodyPr wrap="square" lIns="0" tIns="0" rIns="0" bIns="0" rtlCol="0" anchor="ctr"/>
           <a:lstStyle/>
           <a:p>
-            <a:pPr indent="0" marL="0">
+            <a:pPr marL="0" indent="0">
               <a:buNone/>
             </a:pPr>
             <a:r>
@@ -12150,6 +12719,7 @@
         <a:solidFill>
           <a:srgbClr val="F4F6FA"/>
         </a:solidFill>
+        <a:effectLst/>
       </p:bgPr>
     </p:bg>
     <p:spTree>
@@ -12190,6 +12760,13 @@
             <a:prstDash val="solid"/>
           </a:ln>
         </p:spPr>
+        <p:txBody>
+          <a:bodyPr/>
+          <a:lstStyle/>
+          <a:p>
+            <a:endParaRPr lang="en-US"/>
+          </a:p>
+        </p:txBody>
       </p:sp>
       <p:sp>
         <p:nvSpPr>
@@ -12212,7 +12789,7 @@
           <a:bodyPr wrap="square" lIns="0" tIns="0" rIns="0" bIns="0" rtlCol="0" anchor="ctr"/>
           <a:lstStyle/>
           <a:p>
-            <a:pPr indent="0" marL="0">
+            <a:pPr marL="0" indent="0">
               <a:buNone/>
             </a:pPr>
             <a:r>
@@ -12251,6 +12828,13 @@
             <a:prstDash val="solid"/>
           </a:ln>
         </p:spPr>
+        <p:txBody>
+          <a:bodyPr/>
+          <a:lstStyle/>
+          <a:p>
+            <a:endParaRPr lang="en-US"/>
+          </a:p>
+        </p:txBody>
       </p:sp>
       <p:sp>
         <p:nvSpPr>
@@ -12276,6 +12860,13 @@
             <a:prstDash val="solid"/>
           </a:ln>
         </p:spPr>
+        <p:txBody>
+          <a:bodyPr/>
+          <a:lstStyle/>
+          <a:p>
+            <a:endParaRPr lang="en-US"/>
+          </a:p>
+        </p:txBody>
       </p:sp>
       <p:sp>
         <p:nvSpPr>
@@ -12298,7 +12889,7 @@
           <a:bodyPr wrap="square" lIns="25400" tIns="25400" rIns="25400" bIns="25400" rtlCol="0" anchor="ctr"/>
           <a:lstStyle/>
           <a:p>
-            <a:pPr indent="0" marL="0">
+            <a:pPr marL="0" indent="0">
               <a:buNone/>
             </a:pPr>
             <a:r>
@@ -12334,7 +12925,7 @@
           <a:bodyPr wrap="square" lIns="25400" tIns="25400" rIns="25400" bIns="25400" rtlCol="0" anchor="ctr"/>
           <a:lstStyle/>
           <a:p>
-            <a:pPr indent="0" marL="0">
+            <a:pPr marL="0" indent="0">
               <a:buNone/>
             </a:pPr>
             <a:r>
@@ -12370,7 +12961,7 @@
           <a:bodyPr wrap="square" lIns="0" tIns="0" rIns="0" bIns="0" rtlCol="0" anchor="ctr"/>
           <a:lstStyle/>
           <a:p>
-            <a:pPr algn="ctr" indent="0" marL="0">
+            <a:pPr marL="0" indent="0" algn="ctr">
               <a:buNone/>
             </a:pPr>
             <a:r>
@@ -12409,6 +13000,13 @@
             <a:prstDash val="solid"/>
           </a:ln>
         </p:spPr>
+        <p:txBody>
+          <a:bodyPr/>
+          <a:lstStyle/>
+          <a:p>
+            <a:endParaRPr lang="en-US"/>
+          </a:p>
+        </p:txBody>
       </p:sp>
       <p:sp>
         <p:nvSpPr>
@@ -12434,6 +13032,13 @@
             <a:prstDash val="solid"/>
           </a:ln>
         </p:spPr>
+        <p:txBody>
+          <a:bodyPr/>
+          <a:lstStyle/>
+          <a:p>
+            <a:endParaRPr lang="en-US"/>
+          </a:p>
+        </p:txBody>
       </p:sp>
       <p:sp>
         <p:nvSpPr>
@@ -12456,7 +13061,7 @@
           <a:bodyPr wrap="square" lIns="25400" tIns="25400" rIns="25400" bIns="25400" rtlCol="0" anchor="ctr"/>
           <a:lstStyle/>
           <a:p>
-            <a:pPr indent="0" marL="0">
+            <a:pPr marL="0" indent="0">
               <a:buNone/>
             </a:pPr>
             <a:r>
@@ -12492,7 +13097,7 @@
           <a:bodyPr wrap="square" lIns="25400" tIns="25400" rIns="25400" bIns="25400" rtlCol="0" anchor="ctr"/>
           <a:lstStyle/>
           <a:p>
-            <a:pPr indent="0" marL="0">
+            <a:pPr marL="0" indent="0">
               <a:buNone/>
             </a:pPr>
             <a:r>
@@ -12528,7 +13133,7 @@
           <a:bodyPr wrap="square" lIns="0" tIns="0" rIns="0" bIns="0" rtlCol="0" anchor="ctr"/>
           <a:lstStyle/>
           <a:p>
-            <a:pPr algn="ctr" indent="0" marL="0">
+            <a:pPr marL="0" indent="0" algn="ctr">
               <a:buNone/>
             </a:pPr>
             <a:r>
@@ -12567,6 +13172,13 @@
             <a:prstDash val="solid"/>
           </a:ln>
         </p:spPr>
+        <p:txBody>
+          <a:bodyPr/>
+          <a:lstStyle/>
+          <a:p>
+            <a:endParaRPr lang="en-US"/>
+          </a:p>
+        </p:txBody>
       </p:sp>
       <p:sp>
         <p:nvSpPr>
@@ -12592,6 +13204,13 @@
             <a:prstDash val="solid"/>
           </a:ln>
         </p:spPr>
+        <p:txBody>
+          <a:bodyPr/>
+          <a:lstStyle/>
+          <a:p>
+            <a:endParaRPr lang="en-US"/>
+          </a:p>
+        </p:txBody>
       </p:sp>
       <p:sp>
         <p:nvSpPr>
@@ -12614,7 +13233,7 @@
           <a:bodyPr wrap="square" lIns="25400" tIns="25400" rIns="25400" bIns="25400" rtlCol="0" anchor="ctr"/>
           <a:lstStyle/>
           <a:p>
-            <a:pPr indent="0" marL="0">
+            <a:pPr marL="0" indent="0">
               <a:buNone/>
             </a:pPr>
             <a:r>
@@ -12650,7 +13269,7 @@
           <a:bodyPr wrap="square" lIns="25400" tIns="25400" rIns="25400" bIns="25400" rtlCol="0" anchor="ctr"/>
           <a:lstStyle/>
           <a:p>
-            <a:pPr indent="0" marL="0">
+            <a:pPr marL="0" indent="0">
               <a:buNone/>
             </a:pPr>
             <a:r>
@@ -12686,7 +13305,7 @@
           <a:bodyPr wrap="square" lIns="0" tIns="0" rIns="0" bIns="0" rtlCol="0" anchor="ctr"/>
           <a:lstStyle/>
           <a:p>
-            <a:pPr algn="ctr" indent="0" marL="0">
+            <a:pPr marL="0" indent="0" algn="ctr">
               <a:buNone/>
             </a:pPr>
             <a:r>
@@ -12725,6 +13344,13 @@
             <a:prstDash val="solid"/>
           </a:ln>
         </p:spPr>
+        <p:txBody>
+          <a:bodyPr/>
+          <a:lstStyle/>
+          <a:p>
+            <a:endParaRPr lang="en-US"/>
+          </a:p>
+        </p:txBody>
       </p:sp>
       <p:sp>
         <p:nvSpPr>
@@ -12750,6 +13376,13 @@
             <a:prstDash val="solid"/>
           </a:ln>
         </p:spPr>
+        <p:txBody>
+          <a:bodyPr/>
+          <a:lstStyle/>
+          <a:p>
+            <a:endParaRPr lang="en-US"/>
+          </a:p>
+        </p:txBody>
       </p:sp>
       <p:sp>
         <p:nvSpPr>
@@ -12772,7 +13405,7 @@
           <a:bodyPr wrap="square" lIns="25400" tIns="25400" rIns="25400" bIns="25400" rtlCol="0" anchor="ctr"/>
           <a:lstStyle/>
           <a:p>
-            <a:pPr indent="0" marL="0">
+            <a:pPr marL="0" indent="0">
               <a:buNone/>
             </a:pPr>
             <a:r>
@@ -12808,7 +13441,7 @@
           <a:bodyPr wrap="square" lIns="25400" tIns="25400" rIns="25400" bIns="25400" rtlCol="0" anchor="ctr"/>
           <a:lstStyle/>
           <a:p>
-            <a:pPr indent="0" marL="0">
+            <a:pPr marL="0" indent="0">
               <a:buNone/>
             </a:pPr>
             <a:r>
@@ -12844,7 +13477,7 @@
           <a:bodyPr wrap="square" lIns="0" tIns="0" rIns="0" bIns="0" rtlCol="0" anchor="ctr"/>
           <a:lstStyle/>
           <a:p>
-            <a:pPr algn="ctr" indent="0" marL="0">
+            <a:pPr marL="0" indent="0" algn="ctr">
               <a:buNone/>
             </a:pPr>
             <a:r>
@@ -12883,6 +13516,13 @@
             <a:prstDash val="solid"/>
           </a:ln>
         </p:spPr>
+        <p:txBody>
+          <a:bodyPr/>
+          <a:lstStyle/>
+          <a:p>
+            <a:endParaRPr lang="en-US"/>
+          </a:p>
+        </p:txBody>
       </p:sp>
       <p:sp>
         <p:nvSpPr>
@@ -12908,6 +13548,13 @@
             <a:prstDash val="solid"/>
           </a:ln>
         </p:spPr>
+        <p:txBody>
+          <a:bodyPr/>
+          <a:lstStyle/>
+          <a:p>
+            <a:endParaRPr lang="en-US"/>
+          </a:p>
+        </p:txBody>
       </p:sp>
       <p:sp>
         <p:nvSpPr>
@@ -12930,7 +13577,7 @@
           <a:bodyPr wrap="square" lIns="25400" tIns="25400" rIns="25400" bIns="25400" rtlCol="0" anchor="ctr"/>
           <a:lstStyle/>
           <a:p>
-            <a:pPr indent="0" marL="0">
+            <a:pPr marL="0" indent="0">
               <a:buNone/>
             </a:pPr>
             <a:r>
@@ -12966,7 +13613,7 @@
           <a:bodyPr wrap="square" lIns="25400" tIns="25400" rIns="25400" bIns="25400" rtlCol="0" anchor="ctr"/>
           <a:lstStyle/>
           <a:p>
-            <a:pPr indent="0" marL="0">
+            <a:pPr marL="0" indent="0">
               <a:buNone/>
             </a:pPr>
             <a:r>
@@ -13002,7 +13649,7 @@
           <a:bodyPr wrap="square" lIns="0" tIns="0" rIns="0" bIns="0" rtlCol="0" anchor="ctr"/>
           <a:lstStyle/>
           <a:p>
-            <a:pPr algn="ctr" indent="0" marL="0">
+            <a:pPr marL="0" indent="0" algn="ctr">
               <a:buNone/>
             </a:pPr>
             <a:r>
@@ -13041,6 +13688,13 @@
             <a:prstDash val="solid"/>
           </a:ln>
         </p:spPr>
+        <p:txBody>
+          <a:bodyPr/>
+          <a:lstStyle/>
+          <a:p>
+            <a:endParaRPr lang="en-US"/>
+          </a:p>
+        </p:txBody>
       </p:sp>
       <p:sp>
         <p:nvSpPr>
@@ -13066,6 +13720,13 @@
             <a:prstDash val="solid"/>
           </a:ln>
         </p:spPr>
+        <p:txBody>
+          <a:bodyPr/>
+          <a:lstStyle/>
+          <a:p>
+            <a:endParaRPr lang="en-US"/>
+          </a:p>
+        </p:txBody>
       </p:sp>
       <p:sp>
         <p:nvSpPr>
@@ -13088,7 +13749,7 @@
           <a:bodyPr wrap="square" lIns="25400" tIns="25400" rIns="25400" bIns="25400" rtlCol="0" anchor="ctr"/>
           <a:lstStyle/>
           <a:p>
-            <a:pPr indent="0" marL="0">
+            <a:pPr marL="0" indent="0">
               <a:buNone/>
             </a:pPr>
             <a:r>
@@ -13124,7 +13785,7 @@
           <a:bodyPr wrap="square" lIns="25400" tIns="25400" rIns="25400" bIns="25400" rtlCol="0" anchor="ctr"/>
           <a:lstStyle/>
           <a:p>
-            <a:pPr indent="0" marL="0">
+            <a:pPr marL="0" indent="0">
               <a:buNone/>
             </a:pPr>
             <a:r>
@@ -13160,7 +13821,7 @@
           <a:bodyPr wrap="square" lIns="0" tIns="0" rIns="0" bIns="0" rtlCol="0" anchor="ctr"/>
           <a:lstStyle/>
           <a:p>
-            <a:pPr algn="ctr" indent="0" marL="0">
+            <a:pPr marL="0" indent="0" algn="ctr">
               <a:buNone/>
             </a:pPr>
             <a:r>
@@ -13199,6 +13860,13 @@
             <a:prstDash val="solid"/>
           </a:ln>
         </p:spPr>
+        <p:txBody>
+          <a:bodyPr/>
+          <a:lstStyle/>
+          <a:p>
+            <a:endParaRPr lang="en-US"/>
+          </a:p>
+        </p:txBody>
       </p:sp>
       <p:sp>
         <p:nvSpPr>
@@ -13224,6 +13892,13 @@
             <a:prstDash val="solid"/>
           </a:ln>
         </p:spPr>
+        <p:txBody>
+          <a:bodyPr/>
+          <a:lstStyle/>
+          <a:p>
+            <a:endParaRPr lang="en-US"/>
+          </a:p>
+        </p:txBody>
       </p:sp>
       <p:sp>
         <p:nvSpPr>
@@ -13246,7 +13921,7 @@
           <a:bodyPr wrap="square" lIns="25400" tIns="25400" rIns="25400" bIns="25400" rtlCol="0" anchor="ctr"/>
           <a:lstStyle/>
           <a:p>
-            <a:pPr indent="0" marL="0">
+            <a:pPr marL="0" indent="0">
               <a:buNone/>
             </a:pPr>
             <a:r>
@@ -13282,7 +13957,7 @@
           <a:bodyPr wrap="square" lIns="25400" tIns="25400" rIns="25400" bIns="25400" rtlCol="0" anchor="ctr"/>
           <a:lstStyle/>
           <a:p>
-            <a:pPr indent="0" marL="0">
+            <a:pPr marL="0" indent="0">
               <a:buNone/>
             </a:pPr>
             <a:r>
@@ -13318,7 +13993,7 @@
           <a:bodyPr wrap="square" lIns="0" tIns="0" rIns="0" bIns="0" rtlCol="0" anchor="ctr"/>
           <a:lstStyle/>
           <a:p>
-            <a:pPr algn="ctr" indent="0" marL="0">
+            <a:pPr marL="0" indent="0" algn="ctr">
               <a:buNone/>
             </a:pPr>
             <a:r>
@@ -13357,6 +14032,13 @@
             <a:prstDash val="solid"/>
           </a:ln>
         </p:spPr>
+        <p:txBody>
+          <a:bodyPr/>
+          <a:lstStyle/>
+          <a:p>
+            <a:endParaRPr lang="en-US"/>
+          </a:p>
+        </p:txBody>
       </p:sp>
       <p:sp>
         <p:nvSpPr>
@@ -13382,6 +14064,13 @@
             <a:prstDash val="solid"/>
           </a:ln>
         </p:spPr>
+        <p:txBody>
+          <a:bodyPr/>
+          <a:lstStyle/>
+          <a:p>
+            <a:endParaRPr lang="en-US"/>
+          </a:p>
+        </p:txBody>
       </p:sp>
       <p:sp>
         <p:nvSpPr>
@@ -13404,7 +14093,7 @@
           <a:bodyPr wrap="square" lIns="25400" tIns="25400" rIns="25400" bIns="25400" rtlCol="0" anchor="ctr"/>
           <a:lstStyle/>
           <a:p>
-            <a:pPr indent="0" marL="0">
+            <a:pPr marL="0" indent="0">
               <a:buNone/>
             </a:pPr>
             <a:r>
@@ -13440,7 +14129,7 @@
           <a:bodyPr wrap="square" lIns="25400" tIns="25400" rIns="25400" bIns="25400" rtlCol="0" anchor="ctr"/>
           <a:lstStyle/>
           <a:p>
-            <a:pPr indent="0" marL="0">
+            <a:pPr marL="0" indent="0">
               <a:buNone/>
             </a:pPr>
             <a:r>
@@ -13476,7 +14165,7 @@
           <a:bodyPr wrap="square" lIns="0" tIns="0" rIns="0" bIns="0" rtlCol="0" anchor="ctr"/>
           <a:lstStyle/>
           <a:p>
-            <a:pPr algn="ctr" indent="0" marL="0">
+            <a:pPr marL="0" indent="0" algn="ctr">
               <a:buNone/>
             </a:pPr>
             <a:r>
@@ -13515,6 +14204,13 @@
             <a:prstDash val="solid"/>
           </a:ln>
         </p:spPr>
+        <p:txBody>
+          <a:bodyPr/>
+          <a:lstStyle/>
+          <a:p>
+            <a:endParaRPr lang="en-US"/>
+          </a:p>
+        </p:txBody>
       </p:sp>
       <p:sp>
         <p:nvSpPr>
@@ -13537,7 +14233,7 @@
           <a:bodyPr wrap="square" lIns="0" tIns="0" rIns="0" bIns="0" rtlCol="0" anchor="ctr"/>
           <a:lstStyle/>
           <a:p>
-            <a:pPr indent="0" marL="0">
+            <a:pPr marL="0" indent="0">
               <a:buNone/>
             </a:pPr>
             <a:r>
@@ -13576,6 +14272,13 @@
             <a:prstDash val="solid"/>
           </a:ln>
         </p:spPr>
+        <p:txBody>
+          <a:bodyPr/>
+          <a:lstStyle/>
+          <a:p>
+            <a:endParaRPr lang="en-US"/>
+          </a:p>
+        </p:txBody>
       </p:sp>
       <p:sp>
         <p:nvSpPr>
@@ -13598,7 +14301,7 @@
           <a:bodyPr wrap="square" lIns="0" tIns="0" rIns="0" bIns="0" rtlCol="0" anchor="ctr"/>
           <a:lstStyle/>
           <a:p>
-            <a:pPr indent="0" marL="0">
+            <a:pPr marL="0" indent="0">
               <a:buNone/>
             </a:pPr>
             <a:r>
@@ -13914,4 +14617,319 @@
     </a:ext>
   </a:extLst>
 </a:theme>
+</file>
+
+<file path=ppt/theme/theme2.xml><?xml version="1.0" encoding="utf-8"?>
+<a:theme xmlns:a="http://schemas.openxmlformats.org/drawingml/2006/main" name="Office Theme">
+  <a:themeElements>
+    <a:clrScheme name="Office">
+      <a:dk1>
+        <a:sysClr val="windowText" lastClr="000000"/>
+      </a:dk1>
+      <a:lt1>
+        <a:sysClr val="window" lastClr="FFFFFF"/>
+      </a:lt1>
+      <a:dk2>
+        <a:srgbClr val="0E2841"/>
+      </a:dk2>
+      <a:lt2>
+        <a:srgbClr val="E8E8E8"/>
+      </a:lt2>
+      <a:accent1>
+        <a:srgbClr val="156082"/>
+      </a:accent1>
+      <a:accent2>
+        <a:srgbClr val="E97132"/>
+      </a:accent2>
+      <a:accent3>
+        <a:srgbClr val="196B24"/>
+      </a:accent3>
+      <a:accent4>
+        <a:srgbClr val="0F9ED5"/>
+      </a:accent4>
+      <a:accent5>
+        <a:srgbClr val="A02B93"/>
+      </a:accent5>
+      <a:accent6>
+        <a:srgbClr val="4EA72E"/>
+      </a:accent6>
+      <a:hlink>
+        <a:srgbClr val="467886"/>
+      </a:hlink>
+      <a:folHlink>
+        <a:srgbClr val="96607D"/>
+      </a:folHlink>
+    </a:clrScheme>
+    <a:fontScheme name="Office">
+      <a:majorFont>
+        <a:latin typeface="Aptos Display" panose="02110004020202020204"/>
+        <a:ea typeface=""/>
+        <a:cs typeface=""/>
+        <a:font script="Jpan" typeface="游ゴシック Light"/>
+        <a:font script="Hang" typeface="맑은 고딕"/>
+        <a:font script="Hans" typeface="等线 Light"/>
+        <a:font script="Hant" typeface="新細明體"/>
+        <a:font script="Arab" typeface="Times New Roman"/>
+        <a:font script="Hebr" typeface="Times New Roman"/>
+        <a:font script="Thai" typeface="Angsana New"/>
+        <a:font script="Ethi" typeface="Nyala"/>
+        <a:font script="Beng" typeface="Vrinda"/>
+        <a:font script="Gujr" typeface="Shruti"/>
+        <a:font script="Khmr" typeface="MoolBoran"/>
+        <a:font script="Knda" typeface="Tunga"/>
+        <a:font script="Guru" typeface="Raavi"/>
+        <a:font script="Cans" typeface="Euphemia"/>
+        <a:font script="Cher" typeface="Plantagenet Cherokee"/>
+        <a:font script="Yiii" typeface="Microsoft Yi Baiti"/>
+        <a:font script="Tibt" typeface="Microsoft Himalaya"/>
+        <a:font script="Thaa" typeface="MV Boli"/>
+        <a:font script="Deva" typeface="Mangal"/>
+        <a:font script="Telu" typeface="Gautami"/>
+        <a:font script="Taml" typeface="Latha"/>
+        <a:font script="Syrc" typeface="Estrangelo Edessa"/>
+        <a:font script="Orya" typeface="Kalinga"/>
+        <a:font script="Mlym" typeface="Kartika"/>
+        <a:font script="Laoo" typeface="DokChampa"/>
+        <a:font script="Sinh" typeface="Iskoola Pota"/>
+        <a:font script="Mong" typeface="Mongolian Baiti"/>
+        <a:font script="Viet" typeface="Times New Roman"/>
+        <a:font script="Uigh" typeface="Microsoft Uighur"/>
+        <a:font script="Geor" typeface="Sylfaen"/>
+        <a:font script="Armn" typeface="Arial"/>
+        <a:font script="Bugi" typeface="Leelawadee UI"/>
+        <a:font script="Bopo" typeface="Microsoft JhengHei"/>
+        <a:font script="Java" typeface="Javanese Text"/>
+        <a:font script="Lisu" typeface="Segoe UI"/>
+        <a:font script="Mymr" typeface="Myanmar Text"/>
+        <a:font script="Nkoo" typeface="Ebrima"/>
+        <a:font script="Olck" typeface="Nirmala UI"/>
+        <a:font script="Osma" typeface="Ebrima"/>
+        <a:font script="Phag" typeface="Phagspa"/>
+        <a:font script="Syrn" typeface="Estrangelo Edessa"/>
+        <a:font script="Syrj" typeface="Estrangelo Edessa"/>
+        <a:font script="Syre" typeface="Estrangelo Edessa"/>
+        <a:font script="Sora" typeface="Nirmala UI"/>
+        <a:font script="Tale" typeface="Microsoft Tai Le"/>
+        <a:font script="Talu" typeface="Microsoft New Tai Lue"/>
+        <a:font script="Tfng" typeface="Ebrima"/>
+      </a:majorFont>
+      <a:minorFont>
+        <a:latin typeface="Aptos" panose="02110004020202020204"/>
+        <a:ea typeface=""/>
+        <a:cs typeface=""/>
+        <a:font script="Jpan" typeface="游ゴシック"/>
+        <a:font script="Hang" typeface="맑은 고딕"/>
+        <a:font script="Hans" typeface="等线"/>
+        <a:font script="Hant" typeface="新細明體"/>
+        <a:font script="Arab" typeface="Arial"/>
+        <a:font script="Hebr" typeface="Arial"/>
+        <a:font script="Thai" typeface="Cordia New"/>
+        <a:font script="Ethi" typeface="Nyala"/>
+        <a:font script="Beng" typeface="Vrinda"/>
+        <a:font script="Gujr" typeface="Shruti"/>
+        <a:font script="Khmr" typeface="DaunPenh"/>
+        <a:font script="Knda" typeface="Tunga"/>
+        <a:font script="Guru" typeface="Raavi"/>
+        <a:font script="Cans" typeface="Euphemia"/>
+        <a:font script="Cher" typeface="Plantagenet Cherokee"/>
+        <a:font script="Yiii" typeface="Microsoft Yi Baiti"/>
+        <a:font script="Tibt" typeface="Microsoft Himalaya"/>
+        <a:font script="Thaa" typeface="MV Boli"/>
+        <a:font script="Deva" typeface="Mangal"/>
+        <a:font script="Telu" typeface="Gautami"/>
+        <a:font script="Taml" typeface="Latha"/>
+        <a:font script="Syrc" typeface="Estrangelo Edessa"/>
+        <a:font script="Orya" typeface="Kalinga"/>
+        <a:font script="Mlym" typeface="Kartika"/>
+        <a:font script="Laoo" typeface="DokChampa"/>
+        <a:font script="Sinh" typeface="Iskoola Pota"/>
+        <a:font script="Mong" typeface="Mongolian Baiti"/>
+        <a:font script="Viet" typeface="Arial"/>
+        <a:font script="Uigh" typeface="Microsoft Uighur"/>
+        <a:font script="Geor" typeface="Sylfaen"/>
+        <a:font script="Armn" typeface="Arial"/>
+        <a:font script="Bugi" typeface="Leelawadee UI"/>
+        <a:font script="Bopo" typeface="Microsoft JhengHei"/>
+        <a:font script="Java" typeface="Javanese Text"/>
+        <a:font script="Lisu" typeface="Segoe UI"/>
+        <a:font script="Mymr" typeface="Myanmar Text"/>
+        <a:font script="Nkoo" typeface="Ebrima"/>
+        <a:font script="Olck" typeface="Nirmala UI"/>
+        <a:font script="Osma" typeface="Ebrima"/>
+        <a:font script="Phag" typeface="Phagspa"/>
+        <a:font script="Syrn" typeface="Estrangelo Edessa"/>
+        <a:font script="Syrj" typeface="Estrangelo Edessa"/>
+        <a:font script="Syre" typeface="Estrangelo Edessa"/>
+        <a:font script="Sora" typeface="Nirmala UI"/>
+        <a:font script="Tale" typeface="Microsoft Tai Le"/>
+        <a:font script="Talu" typeface="Microsoft New Tai Lue"/>
+        <a:font script="Tfng" typeface="Ebrima"/>
+      </a:minorFont>
+    </a:fontScheme>
+    <a:fmtScheme name="Office">
+      <a:fillStyleLst>
+        <a:solidFill>
+          <a:schemeClr val="phClr"/>
+        </a:solidFill>
+        <a:gradFill rotWithShape="1">
+          <a:gsLst>
+            <a:gs pos="0">
+              <a:schemeClr val="phClr">
+                <a:lumMod val="110000"/>
+                <a:satMod val="105000"/>
+                <a:tint val="67000"/>
+              </a:schemeClr>
+            </a:gs>
+            <a:gs pos="50000">
+              <a:schemeClr val="phClr">
+                <a:lumMod val="105000"/>
+                <a:satMod val="103000"/>
+                <a:tint val="73000"/>
+              </a:schemeClr>
+            </a:gs>
+            <a:gs pos="100000">
+              <a:schemeClr val="phClr">
+                <a:lumMod val="105000"/>
+                <a:satMod val="109000"/>
+                <a:tint val="81000"/>
+              </a:schemeClr>
+            </a:gs>
+          </a:gsLst>
+          <a:lin ang="5400000" scaled="0"/>
+        </a:gradFill>
+        <a:gradFill rotWithShape="1">
+          <a:gsLst>
+            <a:gs pos="0">
+              <a:schemeClr val="phClr">
+                <a:satMod val="103000"/>
+                <a:lumMod val="102000"/>
+                <a:tint val="94000"/>
+              </a:schemeClr>
+            </a:gs>
+            <a:gs pos="50000">
+              <a:schemeClr val="phClr">
+                <a:satMod val="110000"/>
+                <a:lumMod val="100000"/>
+                <a:shade val="100000"/>
+              </a:schemeClr>
+            </a:gs>
+            <a:gs pos="100000">
+              <a:schemeClr val="phClr">
+                <a:lumMod val="99000"/>
+                <a:satMod val="120000"/>
+                <a:shade val="78000"/>
+              </a:schemeClr>
+            </a:gs>
+          </a:gsLst>
+          <a:lin ang="5400000" scaled="0"/>
+        </a:gradFill>
+      </a:fillStyleLst>
+      <a:lnStyleLst>
+        <a:ln w="12700" cap="flat" cmpd="sng" algn="ctr">
+          <a:solidFill>
+            <a:schemeClr val="phClr"/>
+          </a:solidFill>
+          <a:prstDash val="solid"/>
+          <a:miter lim="800000"/>
+        </a:ln>
+        <a:ln w="19050" cap="flat" cmpd="sng" algn="ctr">
+          <a:solidFill>
+            <a:schemeClr val="phClr"/>
+          </a:solidFill>
+          <a:prstDash val="solid"/>
+          <a:miter lim="800000"/>
+        </a:ln>
+        <a:ln w="25400" cap="flat" cmpd="sng" algn="ctr">
+          <a:solidFill>
+            <a:schemeClr val="phClr"/>
+          </a:solidFill>
+          <a:prstDash val="solid"/>
+          <a:miter lim="800000"/>
+        </a:ln>
+      </a:lnStyleLst>
+      <a:effectStyleLst>
+        <a:effectStyle>
+          <a:effectLst/>
+        </a:effectStyle>
+        <a:effectStyle>
+          <a:effectLst/>
+        </a:effectStyle>
+        <a:effectStyle>
+          <a:effectLst>
+            <a:outerShdw blurRad="57150" dist="19050" dir="5400000" algn="ctr" rotWithShape="0">
+              <a:srgbClr val="000000">
+                <a:alpha val="63000"/>
+              </a:srgbClr>
+            </a:outerShdw>
+          </a:effectLst>
+        </a:effectStyle>
+      </a:effectStyleLst>
+      <a:bgFillStyleLst>
+        <a:solidFill>
+          <a:schemeClr val="phClr"/>
+        </a:solidFill>
+        <a:solidFill>
+          <a:schemeClr val="phClr">
+            <a:tint val="95000"/>
+            <a:satMod val="170000"/>
+          </a:schemeClr>
+        </a:solidFill>
+        <a:gradFill rotWithShape="1">
+          <a:gsLst>
+            <a:gs pos="0">
+              <a:schemeClr val="phClr">
+                <a:tint val="93000"/>
+                <a:satMod val="150000"/>
+                <a:shade val="98000"/>
+                <a:lumMod val="102000"/>
+              </a:schemeClr>
+            </a:gs>
+            <a:gs pos="50000">
+              <a:schemeClr val="phClr">
+                <a:tint val="98000"/>
+                <a:satMod val="130000"/>
+                <a:shade val="90000"/>
+                <a:lumMod val="103000"/>
+              </a:schemeClr>
+            </a:gs>
+            <a:gs pos="100000">
+              <a:schemeClr val="phClr">
+                <a:shade val="63000"/>
+                <a:satMod val="120000"/>
+              </a:schemeClr>
+            </a:gs>
+          </a:gsLst>
+          <a:lin ang="5400000" scaled="0"/>
+        </a:gradFill>
+      </a:bgFillStyleLst>
+    </a:fmtScheme>
+  </a:themeElements>
+  <a:objectDefaults>
+    <a:lnDef>
+      <a:spPr/>
+      <a:bodyPr/>
+      <a:lstStyle/>
+      <a:style>
+        <a:lnRef idx="2">
+          <a:schemeClr val="accent1"/>
+        </a:lnRef>
+        <a:fillRef idx="0">
+          <a:schemeClr val="accent1"/>
+        </a:fillRef>
+        <a:effectRef idx="1">
+          <a:schemeClr val="accent1"/>
+        </a:effectRef>
+        <a:fontRef idx="minor">
+          <a:schemeClr val="tx1"/>
+        </a:fontRef>
+      </a:style>
+    </a:lnDef>
+  </a:objectDefaults>
+  <a:extraClrSchemeLst/>
+  <a:extLst>
+    <a:ext uri="{05A4C25C-085E-4340-85A3-A5531E510DB2}">
+      <thm15:themeFamily xmlns:thm15="http://schemas.microsoft.com/office/thememl/2012/main" name="Office Theme" id="{2E142A2C-CD16-42D6-873A-C26D2A0506FA}" vid="{1BDDFF52-6CD6-40A5-AB3C-68EB2F1E4D0A}"/>
+    </a:ext>
+  </a:extLst>
+</a:theme>
 </file>